--- a/slides/modules/m24-agentic-ai.pptx
+++ b/slides/modules/m24-agentic-ai.pptx
@@ -12,6 +12,7 @@
     <p:sldId id="260" r:id="rId12"/>
     <p:sldId id="261" r:id="rId13"/>
     <p:sldId id="262" r:id="rId14"/>
+    <p:sldId id="263" r:id="rId15"/>
   </p:sldIdLst>
   <p:sldSz cx="12191695" cy="6858000" type="screen4x3"/>
   <p:notesSz cx="6858000" cy="9144000"/>
@@ -859,6 +860,76 @@
           <a:p>
             <a:r>
               <a:t>In the lab you drive the live agent and watch it call get_claim and search_policies to ground its answers, citing the policy it used. You see the honest edges that earn trust — an unknown claim answered "not found" instead of invented, and the terse question that prints the tool call as text without running it. You observe the agent — each answer reports its tokens and which tools it called, and Prometheus exposes GenAI token metrics per model. And you confirm the punchline: strip away the word AI and the agent is a Quarkus Deployment with a Service, an edge Route, and health probes — the readiness probe even pings both MCP servers, so a Ready agent has proven its tool wiring — shipped through the same golden path as every other app. Close on honesty about when not to use this: when a plain API call will do, don't add a model; don't RAG what fits in the prompt; and never put an agent on regulated data without the guardrail layer. The model is new; the disciplines are not.</a:t>
+            </a:r>
+          </a:p>
+        </p:txBody>
+      </p:sp>
+      <p:sp>
+        <p:nvSpPr>
+          <p:cNvPr id="4" name="Slide Number Placeholder 3"/>
+          <p:cNvSpPr>
+            <a:spLocks noGrp="1"/>
+          </p:cNvSpPr>
+          <p:nvPr>
+            <p:ph type="sldNum" idx="5" sz="quarter"/>
+          </p:nvPr>
+        </p:nvSpPr>
+        <p:spPr/>
+      </p:sp>
+    </p:spTree>
+  </p:cSld>
+  <p:clrMapOvr>
+    <a:masterClrMapping/>
+  </p:clrMapOvr>
+</p:notes>
+</file>
+
+<file path=ppt/notesSlides/notesSlide7.xml><?xml version="1.0" encoding="utf-8"?>
+<p:notes xmlns:a="http://schemas.openxmlformats.org/drawingml/2006/main" xmlns:p="http://schemas.openxmlformats.org/presentationml/2006/main" xmlns:r="http://schemas.openxmlformats.org/officeDocument/2006/relationships">
+  <p:cSld>
+    <p:spTree>
+      <p:nvGrpSpPr>
+        <p:cNvPr id="1" name=""/>
+        <p:cNvGrpSpPr/>
+        <p:nvPr/>
+      </p:nvGrpSpPr>
+      <p:grpSpPr>
+        <a:xfrm>
+          <a:off x="0" y="0"/>
+          <a:ext cx="0" cy="0"/>
+          <a:chOff x="0" y="0"/>
+          <a:chExt cx="0" cy="0"/>
+        </a:xfrm>
+      </p:grpSpPr>
+      <p:sp>
+        <p:nvSpPr>
+          <p:cNvPr id="2" name="Slide Image Placeholder 1"/>
+          <p:cNvSpPr>
+            <a:spLocks noGrp="1"/>
+          </p:cNvSpPr>
+          <p:nvPr>
+            <p:ph type="sldImg" idx="2"/>
+          </p:nvPr>
+        </p:nvSpPr>
+        <p:spPr/>
+      </p:sp>
+      <p:sp>
+        <p:nvSpPr>
+          <p:cNvPr id="3" name="Notes Placeholder 2"/>
+          <p:cNvSpPr>
+            <a:spLocks noGrp="1"/>
+          </p:cNvSpPr>
+          <p:nvPr>
+            <p:ph type="body" idx="3" sz="quarter"/>
+          </p:nvPr>
+        </p:nvSpPr>
+        <p:spPr/>
+        <p:txBody>
+          <a:bodyPr/>
+          <a:lstStyle/>
+          <a:p>
+            <a:r>
+              <a:t>Concept diagram: Agent recap.</a:t>
             </a:r>
           </a:p>
         </p:txBody>
@@ -4281,11 +4352,11 @@
         <p:spPr>
           <a:xfrm>
             <a:off x="841248" y="2670048"/>
-            <a:ext cx="5715000" cy="530352"/>
+            <a:ext cx="5138928" cy="786384"/>
           </a:xfrm>
           <a:prstGeom prst="roundRect">
             <a:avLst>
-              <a:gd name="adj" fmla="val 6000"/>
+              <a:gd name="adj" fmla="val 7000"/>
             </a:avLst>
           </a:prstGeom>
           <a:solidFill>
@@ -4320,9 +4391,55 @@
           </a:p>
         </p:txBody>
       </p:sp>
+      <p:sp>
+        <p:nvSpPr>
+          <p:cNvPr id="8" name="Rounded Rectangle 7"/>
+          <p:cNvSpPr/>
+          <p:nvPr/>
+        </p:nvSpPr>
+        <p:spPr>
+          <a:xfrm>
+            <a:off x="987552" y="2807208"/>
+            <a:ext cx="512064" cy="512064"/>
+          </a:xfrm>
+          <a:prstGeom prst="roundRect">
+            <a:avLst>
+              <a:gd name="adj" fmla="val 26000"/>
+            </a:avLst>
+          </a:prstGeom>
+          <a:solidFill>
+            <a:srgbClr val="EE0000"/>
+          </a:solidFill>
+          <a:ln>
+            <a:noFill/>
+          </a:ln>
+          <a:effectLst/>
+        </p:spPr>
+        <p:style>
+          <a:lnRef idx="1">
+            <a:schemeClr val="accent1"/>
+          </a:lnRef>
+          <a:fillRef idx="3">
+            <a:schemeClr val="accent1"/>
+          </a:fillRef>
+          <a:effectRef idx="2">
+            <a:schemeClr val="accent1"/>
+          </a:effectRef>
+          <a:fontRef idx="minor">
+            <a:schemeClr val="lt1"/>
+          </a:fontRef>
+        </p:style>
+        <p:txBody>
+          <a:bodyPr rtlCol="0" anchor="ctr"/>
+          <a:lstStyle/>
+          <a:p>
+            <a:pPr algn="ctr"/>
+          </a:p>
+        </p:txBody>
+      </p:sp>
       <p:pic>
         <p:nvPicPr>
-          <p:cNvPr id="8" name="Picture 7" descr="check_steel.png"/>
+          <p:cNvPr id="9" name="Picture 8" descr="check_white.png"/>
           <p:cNvPicPr>
             <a:picLocks noChangeAspect="1"/>
           </p:cNvPicPr>
@@ -4336,8 +4453,8 @@
         </p:blipFill>
         <p:spPr>
           <a:xfrm>
-            <a:off x="987552" y="2816352"/>
-            <a:ext cx="237744" cy="237744"/>
+            <a:off x="1110447" y="2930103"/>
+            <a:ext cx="266273" cy="266273"/>
           </a:xfrm>
           <a:prstGeom prst="rect">
             <a:avLst/>
@@ -4346,14 +4463,14 @@
       </p:pic>
       <p:sp>
         <p:nvSpPr>
-          <p:cNvPr id="9" name="TextBox 8"/>
+          <p:cNvPr id="10" name="TextBox 9"/>
           <p:cNvSpPr txBox="1"/>
           <p:nvPr/>
         </p:nvSpPr>
         <p:spPr>
           <a:xfrm>
-            <a:off x="1353312" y="2670048"/>
-            <a:ext cx="5029200" cy="530352"/>
+            <a:off x="1627632" y="2670048"/>
+            <a:ext cx="4206240" cy="786384"/>
           </a:xfrm>
           <a:prstGeom prst="rect">
             <a:avLst/>
@@ -4378,7 +4495,7 @@
               </a:spcAft>
             </a:pPr>
             <a:r>
-              <a:rPr sz="1200" b="0">
+              <a:rPr sz="1150" b="0">
                 <a:solidFill>
                   <a:srgbClr val="1A1A1A"/>
                 </a:solidFill>
@@ -4391,18 +4508,18 @@
       </p:sp>
       <p:sp>
         <p:nvSpPr>
-          <p:cNvPr id="10" name="Rounded Rectangle 9"/>
+          <p:cNvPr id="11" name="Rounded Rectangle 10"/>
           <p:cNvSpPr/>
           <p:nvPr/>
         </p:nvSpPr>
         <p:spPr>
           <a:xfrm>
-            <a:off x="841248" y="3273552"/>
-            <a:ext cx="5715000" cy="530352"/>
+            <a:off x="6254496" y="2670048"/>
+            <a:ext cx="5138928" cy="786384"/>
           </a:xfrm>
           <a:prstGeom prst="roundRect">
             <a:avLst>
-              <a:gd name="adj" fmla="val 6000"/>
+              <a:gd name="adj" fmla="val 7000"/>
             </a:avLst>
           </a:prstGeom>
           <a:solidFill>
@@ -4437,9 +4554,55 @@
           </a:p>
         </p:txBody>
       </p:sp>
+      <p:sp>
+        <p:nvSpPr>
+          <p:cNvPr id="12" name="Rounded Rectangle 11"/>
+          <p:cNvSpPr/>
+          <p:nvPr/>
+        </p:nvSpPr>
+        <p:spPr>
+          <a:xfrm>
+            <a:off x="6400800" y="2807208"/>
+            <a:ext cx="512064" cy="512064"/>
+          </a:xfrm>
+          <a:prstGeom prst="roundRect">
+            <a:avLst>
+              <a:gd name="adj" fmla="val 26000"/>
+            </a:avLst>
+          </a:prstGeom>
+          <a:solidFill>
+            <a:srgbClr val="EE0000"/>
+          </a:solidFill>
+          <a:ln>
+            <a:noFill/>
+          </a:ln>
+          <a:effectLst/>
+        </p:spPr>
+        <p:style>
+          <a:lnRef idx="1">
+            <a:schemeClr val="accent1"/>
+          </a:lnRef>
+          <a:fillRef idx="3">
+            <a:schemeClr val="accent1"/>
+          </a:fillRef>
+          <a:effectRef idx="2">
+            <a:schemeClr val="accent1"/>
+          </a:effectRef>
+          <a:fontRef idx="minor">
+            <a:schemeClr val="lt1"/>
+          </a:fontRef>
+        </p:style>
+        <p:txBody>
+          <a:bodyPr rtlCol="0" anchor="ctr"/>
+          <a:lstStyle/>
+          <a:p>
+            <a:pPr algn="ctr"/>
+          </a:p>
+        </p:txBody>
+      </p:sp>
       <p:pic>
         <p:nvPicPr>
-          <p:cNvPr id="11" name="Picture 10" descr="check_steel.png"/>
+          <p:cNvPr id="13" name="Picture 12" descr="check_white.png"/>
           <p:cNvPicPr>
             <a:picLocks noChangeAspect="1"/>
           </p:cNvPicPr>
@@ -4453,8 +4616,8 @@
         </p:blipFill>
         <p:spPr>
           <a:xfrm>
-            <a:off x="987552" y="3419856"/>
-            <a:ext cx="237744" cy="237744"/>
+            <a:off x="6523695" y="2930103"/>
+            <a:ext cx="266273" cy="266273"/>
           </a:xfrm>
           <a:prstGeom prst="rect">
             <a:avLst/>
@@ -4463,14 +4626,14 @@
       </p:pic>
       <p:sp>
         <p:nvSpPr>
-          <p:cNvPr id="12" name="TextBox 11"/>
+          <p:cNvPr id="14" name="TextBox 13"/>
           <p:cNvSpPr txBox="1"/>
           <p:nvPr/>
         </p:nvSpPr>
         <p:spPr>
           <a:xfrm>
-            <a:off x="1353312" y="3273552"/>
-            <a:ext cx="5029200" cy="530352"/>
+            <a:off x="7040880" y="2670048"/>
+            <a:ext cx="4206240" cy="786384"/>
           </a:xfrm>
           <a:prstGeom prst="rect">
             <a:avLst/>
@@ -4495,7 +4658,7 @@
               </a:spcAft>
             </a:pPr>
             <a:r>
-              <a:rPr sz="1200" b="0">
+              <a:rPr sz="1150" b="0">
                 <a:solidFill>
                   <a:srgbClr val="1A1A1A"/>
                 </a:solidFill>
@@ -4508,18 +4671,18 @@
       </p:sp>
       <p:sp>
         <p:nvSpPr>
-          <p:cNvPr id="13" name="Rounded Rectangle 12"/>
+          <p:cNvPr id="15" name="Rounded Rectangle 14"/>
           <p:cNvSpPr/>
           <p:nvPr/>
         </p:nvSpPr>
         <p:spPr>
           <a:xfrm>
-            <a:off x="841248" y="3877056"/>
-            <a:ext cx="5715000" cy="530352"/>
+            <a:off x="841248" y="3602736"/>
+            <a:ext cx="5138928" cy="786384"/>
           </a:xfrm>
           <a:prstGeom prst="roundRect">
             <a:avLst>
-              <a:gd name="adj" fmla="val 6000"/>
+              <a:gd name="adj" fmla="val 7000"/>
             </a:avLst>
           </a:prstGeom>
           <a:solidFill>
@@ -4554,9 +4717,55 @@
           </a:p>
         </p:txBody>
       </p:sp>
+      <p:sp>
+        <p:nvSpPr>
+          <p:cNvPr id="16" name="Rounded Rectangle 15"/>
+          <p:cNvSpPr/>
+          <p:nvPr/>
+        </p:nvSpPr>
+        <p:spPr>
+          <a:xfrm>
+            <a:off x="987552" y="3739896"/>
+            <a:ext cx="512064" cy="512064"/>
+          </a:xfrm>
+          <a:prstGeom prst="roundRect">
+            <a:avLst>
+              <a:gd name="adj" fmla="val 26000"/>
+            </a:avLst>
+          </a:prstGeom>
+          <a:solidFill>
+            <a:srgbClr val="EE0000"/>
+          </a:solidFill>
+          <a:ln>
+            <a:noFill/>
+          </a:ln>
+          <a:effectLst/>
+        </p:spPr>
+        <p:style>
+          <a:lnRef idx="1">
+            <a:schemeClr val="accent1"/>
+          </a:lnRef>
+          <a:fillRef idx="3">
+            <a:schemeClr val="accent1"/>
+          </a:fillRef>
+          <a:effectRef idx="2">
+            <a:schemeClr val="accent1"/>
+          </a:effectRef>
+          <a:fontRef idx="minor">
+            <a:schemeClr val="lt1"/>
+          </a:fontRef>
+        </p:style>
+        <p:txBody>
+          <a:bodyPr rtlCol="0" anchor="ctr"/>
+          <a:lstStyle/>
+          <a:p>
+            <a:pPr algn="ctr"/>
+          </a:p>
+        </p:txBody>
+      </p:sp>
       <p:pic>
         <p:nvPicPr>
-          <p:cNvPr id="14" name="Picture 13" descr="check_steel.png"/>
+          <p:cNvPr id="17" name="Picture 16" descr="check_white.png"/>
           <p:cNvPicPr>
             <a:picLocks noChangeAspect="1"/>
           </p:cNvPicPr>
@@ -4570,8 +4779,8 @@
         </p:blipFill>
         <p:spPr>
           <a:xfrm>
-            <a:off x="987552" y="4023360"/>
-            <a:ext cx="237744" cy="237744"/>
+            <a:off x="1110447" y="3862791"/>
+            <a:ext cx="266273" cy="266273"/>
           </a:xfrm>
           <a:prstGeom prst="rect">
             <a:avLst/>
@@ -4580,14 +4789,14 @@
       </p:pic>
       <p:sp>
         <p:nvSpPr>
-          <p:cNvPr id="15" name="TextBox 14"/>
+          <p:cNvPr id="18" name="TextBox 17"/>
           <p:cNvSpPr txBox="1"/>
           <p:nvPr/>
         </p:nvSpPr>
         <p:spPr>
           <a:xfrm>
-            <a:off x="1353312" y="3877056"/>
-            <a:ext cx="5029200" cy="530352"/>
+            <a:off x="1627632" y="3602736"/>
+            <a:ext cx="4206240" cy="786384"/>
           </a:xfrm>
           <a:prstGeom prst="rect">
             <a:avLst/>
@@ -4612,7 +4821,7 @@
               </a:spcAft>
             </a:pPr>
             <a:r>
-              <a:rPr sz="1200" b="0">
+              <a:rPr sz="1150" b="0">
                 <a:solidFill>
                   <a:srgbClr val="1A1A1A"/>
                 </a:solidFill>
@@ -4625,18 +4834,18 @@
       </p:sp>
       <p:sp>
         <p:nvSpPr>
-          <p:cNvPr id="16" name="Rounded Rectangle 15"/>
+          <p:cNvPr id="19" name="Rounded Rectangle 18"/>
           <p:cNvSpPr/>
           <p:nvPr/>
         </p:nvSpPr>
         <p:spPr>
           <a:xfrm>
-            <a:off x="841248" y="4480560"/>
-            <a:ext cx="5715000" cy="530352"/>
+            <a:off x="6254496" y="3602736"/>
+            <a:ext cx="5138928" cy="786384"/>
           </a:xfrm>
           <a:prstGeom prst="roundRect">
             <a:avLst>
-              <a:gd name="adj" fmla="val 6000"/>
+              <a:gd name="adj" fmla="val 7000"/>
             </a:avLst>
           </a:prstGeom>
           <a:solidFill>
@@ -4671,9 +4880,55 @@
           </a:p>
         </p:txBody>
       </p:sp>
+      <p:sp>
+        <p:nvSpPr>
+          <p:cNvPr id="20" name="Rounded Rectangle 19"/>
+          <p:cNvSpPr/>
+          <p:nvPr/>
+        </p:nvSpPr>
+        <p:spPr>
+          <a:xfrm>
+            <a:off x="6400800" y="3739896"/>
+            <a:ext cx="512064" cy="512064"/>
+          </a:xfrm>
+          <a:prstGeom prst="roundRect">
+            <a:avLst>
+              <a:gd name="adj" fmla="val 26000"/>
+            </a:avLst>
+          </a:prstGeom>
+          <a:solidFill>
+            <a:srgbClr val="EE0000"/>
+          </a:solidFill>
+          <a:ln>
+            <a:noFill/>
+          </a:ln>
+          <a:effectLst/>
+        </p:spPr>
+        <p:style>
+          <a:lnRef idx="1">
+            <a:schemeClr val="accent1"/>
+          </a:lnRef>
+          <a:fillRef idx="3">
+            <a:schemeClr val="accent1"/>
+          </a:fillRef>
+          <a:effectRef idx="2">
+            <a:schemeClr val="accent1"/>
+          </a:effectRef>
+          <a:fontRef idx="minor">
+            <a:schemeClr val="lt1"/>
+          </a:fontRef>
+        </p:style>
+        <p:txBody>
+          <a:bodyPr rtlCol="0" anchor="ctr"/>
+          <a:lstStyle/>
+          <a:p>
+            <a:pPr algn="ctr"/>
+          </a:p>
+        </p:txBody>
+      </p:sp>
       <p:pic>
         <p:nvPicPr>
-          <p:cNvPr id="17" name="Picture 16" descr="check_steel.png"/>
+          <p:cNvPr id="21" name="Picture 20" descr="check_white.png"/>
           <p:cNvPicPr>
             <a:picLocks noChangeAspect="1"/>
           </p:cNvPicPr>
@@ -4687,8 +4942,8 @@
         </p:blipFill>
         <p:spPr>
           <a:xfrm>
-            <a:off x="987552" y="4626864"/>
-            <a:ext cx="237744" cy="237744"/>
+            <a:off x="6523695" y="3862791"/>
+            <a:ext cx="266273" cy="266273"/>
           </a:xfrm>
           <a:prstGeom prst="rect">
             <a:avLst/>
@@ -4697,14 +4952,14 @@
       </p:pic>
       <p:sp>
         <p:nvSpPr>
-          <p:cNvPr id="18" name="TextBox 17"/>
+          <p:cNvPr id="22" name="TextBox 21"/>
           <p:cNvSpPr txBox="1"/>
           <p:nvPr/>
         </p:nvSpPr>
         <p:spPr>
           <a:xfrm>
-            <a:off x="1353312" y="4480560"/>
-            <a:ext cx="5029200" cy="530352"/>
+            <a:off x="7040880" y="3602736"/>
+            <a:ext cx="4206240" cy="786384"/>
           </a:xfrm>
           <a:prstGeom prst="rect">
             <a:avLst/>
@@ -4729,7 +4984,7 @@
               </a:spcAft>
             </a:pPr>
             <a:r>
-              <a:rPr sz="1200" b="0">
+              <a:rPr sz="1150" b="0">
                 <a:solidFill>
                   <a:srgbClr val="1A1A1A"/>
                 </a:solidFill>
@@ -4742,18 +4997,18 @@
       </p:sp>
       <p:sp>
         <p:nvSpPr>
-          <p:cNvPr id="19" name="Rounded Rectangle 18"/>
+          <p:cNvPr id="23" name="Rounded Rectangle 22"/>
           <p:cNvSpPr/>
           <p:nvPr/>
         </p:nvSpPr>
         <p:spPr>
           <a:xfrm>
-            <a:off x="841248" y="5084064"/>
-            <a:ext cx="5715000" cy="530352"/>
+            <a:off x="841248" y="4535424"/>
+            <a:ext cx="5138928" cy="786384"/>
           </a:xfrm>
           <a:prstGeom prst="roundRect">
             <a:avLst>
-              <a:gd name="adj" fmla="val 6000"/>
+              <a:gd name="adj" fmla="val 7000"/>
             </a:avLst>
           </a:prstGeom>
           <a:solidFill>
@@ -4788,9 +5043,55 @@
           </a:p>
         </p:txBody>
       </p:sp>
+      <p:sp>
+        <p:nvSpPr>
+          <p:cNvPr id="24" name="Rounded Rectangle 23"/>
+          <p:cNvSpPr/>
+          <p:nvPr/>
+        </p:nvSpPr>
+        <p:spPr>
+          <a:xfrm>
+            <a:off x="987552" y="4672584"/>
+            <a:ext cx="512064" cy="512064"/>
+          </a:xfrm>
+          <a:prstGeom prst="roundRect">
+            <a:avLst>
+              <a:gd name="adj" fmla="val 26000"/>
+            </a:avLst>
+          </a:prstGeom>
+          <a:solidFill>
+            <a:srgbClr val="EE0000"/>
+          </a:solidFill>
+          <a:ln>
+            <a:noFill/>
+          </a:ln>
+          <a:effectLst/>
+        </p:spPr>
+        <p:style>
+          <a:lnRef idx="1">
+            <a:schemeClr val="accent1"/>
+          </a:lnRef>
+          <a:fillRef idx="3">
+            <a:schemeClr val="accent1"/>
+          </a:fillRef>
+          <a:effectRef idx="2">
+            <a:schemeClr val="accent1"/>
+          </a:effectRef>
+          <a:fontRef idx="minor">
+            <a:schemeClr val="lt1"/>
+          </a:fontRef>
+        </p:style>
+        <p:txBody>
+          <a:bodyPr rtlCol="0" anchor="ctr"/>
+          <a:lstStyle/>
+          <a:p>
+            <a:pPr algn="ctr"/>
+          </a:p>
+        </p:txBody>
+      </p:sp>
       <p:pic>
         <p:nvPicPr>
-          <p:cNvPr id="20" name="Picture 19" descr="check_steel.png"/>
+          <p:cNvPr id="25" name="Picture 24" descr="check_white.png"/>
           <p:cNvPicPr>
             <a:picLocks noChangeAspect="1"/>
           </p:cNvPicPr>
@@ -4804,8 +5105,8 @@
         </p:blipFill>
         <p:spPr>
           <a:xfrm>
-            <a:off x="987552" y="5230368"/>
-            <a:ext cx="237744" cy="237744"/>
+            <a:off x="1110447" y="4795479"/>
+            <a:ext cx="266273" cy="266273"/>
           </a:xfrm>
           <a:prstGeom prst="rect">
             <a:avLst/>
@@ -4814,14 +5115,14 @@
       </p:pic>
       <p:sp>
         <p:nvSpPr>
-          <p:cNvPr id="21" name="TextBox 20"/>
+          <p:cNvPr id="26" name="TextBox 25"/>
           <p:cNvSpPr txBox="1"/>
           <p:nvPr/>
         </p:nvSpPr>
         <p:spPr>
           <a:xfrm>
-            <a:off x="1353312" y="5084064"/>
-            <a:ext cx="5029200" cy="530352"/>
+            <a:off x="1627632" y="4535424"/>
+            <a:ext cx="4206240" cy="786384"/>
           </a:xfrm>
           <a:prstGeom prst="rect">
             <a:avLst/>
@@ -4846,221 +5147,13 @@
               </a:spcAft>
             </a:pPr>
             <a:r>
-              <a:rPr sz="1200" b="0">
+              <a:rPr sz="1150" b="0">
                 <a:solidFill>
                   <a:srgbClr val="1A1A1A"/>
                 </a:solidFill>
                 <a:latin typeface="Red Hat Text"/>
               </a:rPr>
               <a:t>The fix is an AGENT: the model does language, your systems provide the FACTS</a:t>
-            </a:r>
-          </a:p>
-        </p:txBody>
-      </p:sp>
-      <p:sp>
-        <p:nvSpPr>
-          <p:cNvPr id="22" name="Rounded Rectangle 21"/>
-          <p:cNvSpPr/>
-          <p:nvPr/>
-        </p:nvSpPr>
-        <p:spPr>
-          <a:xfrm>
-            <a:off x="6812280" y="2670048"/>
-            <a:ext cx="4538167" cy="2944368"/>
-          </a:xfrm>
-          <a:prstGeom prst="roundRect">
-            <a:avLst>
-              <a:gd name="adj" fmla="val 4000"/>
-            </a:avLst>
-          </a:prstGeom>
-          <a:solidFill>
-            <a:srgbClr val="FFFFFF"/>
-          </a:solidFill>
-          <a:ln w="15240">
-            <a:solidFill>
-              <a:srgbClr val="DDE1E6"/>
-            </a:solidFill>
-          </a:ln>
-          <a:effectLst/>
-        </p:spPr>
-        <p:style>
-          <a:lnRef idx="1">
-            <a:schemeClr val="accent1"/>
-          </a:lnRef>
-          <a:fillRef idx="3">
-            <a:schemeClr val="accent1"/>
-          </a:fillRef>
-          <a:effectRef idx="2">
-            <a:schemeClr val="accent1"/>
-          </a:effectRef>
-          <a:fontRef idx="minor">
-            <a:schemeClr val="lt1"/>
-          </a:fontRef>
-        </p:style>
-        <p:txBody>
-          <a:bodyPr rtlCol="0" anchor="ctr"/>
-          <a:lstStyle/>
-          <a:p>
-            <a:pPr algn="ctr"/>
-          </a:p>
-        </p:txBody>
-      </p:sp>
-      <p:sp>
-        <p:nvSpPr>
-          <p:cNvPr id="23" name="Rounded Rectangle 22"/>
-          <p:cNvSpPr/>
-          <p:nvPr/>
-        </p:nvSpPr>
-        <p:spPr>
-          <a:xfrm>
-            <a:off x="7013448" y="2871216"/>
-            <a:ext cx="1298448" cy="310896"/>
-          </a:xfrm>
-          <a:prstGeom prst="roundRect">
-            <a:avLst>
-              <a:gd name="adj" fmla="val 50000"/>
-            </a:avLst>
-          </a:prstGeom>
-          <a:solidFill>
-            <a:srgbClr val="FCECEC"/>
-          </a:solidFill>
-          <a:ln>
-            <a:noFill/>
-          </a:ln>
-          <a:effectLst/>
-        </p:spPr>
-        <p:style>
-          <a:lnRef idx="1">
-            <a:schemeClr val="accent1"/>
-          </a:lnRef>
-          <a:fillRef idx="3">
-            <a:schemeClr val="accent1"/>
-          </a:fillRef>
-          <a:effectRef idx="2">
-            <a:schemeClr val="accent1"/>
-          </a:effectRef>
-          <a:fontRef idx="minor">
-            <a:schemeClr val="lt1"/>
-          </a:fontRef>
-        </p:style>
-        <p:txBody>
-          <a:bodyPr rtlCol="0" anchor="ctr"/>
-          <a:lstStyle/>
-          <a:p>
-            <a:pPr algn="ctr"/>
-          </a:p>
-        </p:txBody>
-      </p:sp>
-      <p:sp>
-        <p:nvSpPr>
-          <p:cNvPr id="24" name="TextBox 23"/>
-          <p:cNvSpPr txBox="1"/>
-          <p:nvPr/>
-        </p:nvSpPr>
-        <p:spPr>
-          <a:xfrm>
-            <a:off x="7013448" y="2871216"/>
-            <a:ext cx="1298448" cy="310896"/>
-          </a:xfrm>
-          <a:prstGeom prst="rect">
-            <a:avLst/>
-          </a:prstGeom>
-          <a:noFill/>
-        </p:spPr>
-        <p:txBody>
-          <a:bodyPr wrap="none" anchor="ctr" lIns="0" rIns="0" tIns="0" bIns="0">
-            <a:spAutoFit/>
-          </a:bodyPr>
-          <a:lstStyle/>
-          <a:p>
-            <a:pPr algn="ctr">
-              <a:lnSpc>
-                <a:spcPct val="106000"/>
-              </a:lnSpc>
-              <a:spcBef>
-                <a:spcPts val="0"/>
-              </a:spcBef>
-              <a:spcAft>
-                <a:spcPts val="0"/>
-              </a:spcAft>
-            </a:pPr>
-            <a:r>
-              <a:rPr sz="850" b="1">
-                <a:solidFill>
-                  <a:srgbClr val="B80000"/>
-                </a:solidFill>
-                <a:latin typeface="Red Hat Display"/>
-              </a:rPr>
-              <a:t>MEDIA PASS</a:t>
-            </a:r>
-          </a:p>
-        </p:txBody>
-      </p:sp>
-      <p:pic>
-        <p:nvPicPr>
-          <p:cNvPr id="25" name="Picture 24" descr="eye_slate.png"/>
-          <p:cNvPicPr>
-            <a:picLocks noChangeAspect="1"/>
-          </p:cNvPicPr>
-          <p:nvPr/>
-        </p:nvPicPr>
-        <p:blipFill>
-          <a:blip r:embed="rId4"/>
-          <a:stretch>
-            <a:fillRect/>
-          </a:stretch>
-        </p:blipFill>
-        <p:spPr>
-          <a:xfrm>
-            <a:off x="8843619" y="3383280"/>
-            <a:ext cx="475488" cy="475488"/>
-          </a:xfrm>
-          <a:prstGeom prst="rect">
-            <a:avLst/>
-          </a:prstGeom>
-        </p:spPr>
-      </p:pic>
-      <p:sp>
-        <p:nvSpPr>
-          <p:cNvPr id="26" name="TextBox 25"/>
-          <p:cNvSpPr txBox="1"/>
-          <p:nvPr/>
-        </p:nvSpPr>
-        <p:spPr>
-          <a:xfrm>
-            <a:off x="7050024" y="3995928"/>
-            <a:ext cx="4062679" cy="1481328"/>
-          </a:xfrm>
-          <a:prstGeom prst="rect">
-            <a:avLst/>
-          </a:prstGeom>
-          <a:noFill/>
-        </p:spPr>
-        <p:txBody>
-          <a:bodyPr wrap="square" anchor="t" lIns="0" rIns="0" tIns="0" bIns="0">
-            <a:spAutoFit/>
-          </a:bodyPr>
-          <a:lstStyle/>
-          <a:p>
-            <a:pPr algn="l">
-              <a:lnSpc>
-                <a:spcPct val="120000"/>
-              </a:lnSpc>
-              <a:spcBef>
-                <a:spcPts val="0"/>
-              </a:spcBef>
-              <a:spcAft>
-                <a:spcPts val="0"/>
-              </a:spcAft>
-            </a:pPr>
-            <a:r>
-              <a:rPr sz="950" b="0">
-                <a:solidFill>
-                  <a:srgbClr val="8A9099"/>
-                </a:solidFill>
-                <a:latin typeface="Red Hat Text"/>
-              </a:rPr>
-              <a:t>Left panel "Ask the model" — a chat bubble "CLM-1004 is Approved ✓" stamped with a big red "HALLUCINATED — the model never saw this claim." Right panel "Ask the agent" — the same question routed through an agent that calls a get_claim tool, returning "CLM-1004: Denied" stamped green "GROUNDED — from the system of record." Arrow between labeled "tools, not training."</a:t>
             </a:r>
           </a:p>
         </p:txBody>
@@ -5368,7 +5461,7 @@
         <p:spPr>
           <a:xfrm>
             <a:off x="841248" y="2395728"/>
-            <a:ext cx="5715000" cy="530352"/>
+            <a:ext cx="4160520" cy="475488"/>
           </a:xfrm>
           <a:prstGeom prst="roundRect">
             <a:avLst>
@@ -5423,8 +5516,8 @@
         </p:blipFill>
         <p:spPr>
           <a:xfrm>
-            <a:off x="987552" y="2542032"/>
-            <a:ext cx="237744" cy="237744"/>
+            <a:off x="969264" y="2532888"/>
+            <a:ext cx="201168" cy="201168"/>
           </a:xfrm>
           <a:prstGeom prst="rect">
             <a:avLst/>
@@ -5439,8 +5532,8 @@
         </p:nvSpPr>
         <p:spPr>
           <a:xfrm>
-            <a:off x="1353312" y="2395728"/>
-            <a:ext cx="5029200" cy="530352"/>
+            <a:off x="1280160" y="2395728"/>
+            <a:ext cx="3593591" cy="475488"/>
           </a:xfrm>
           <a:prstGeom prst="rect">
             <a:avLst/>
@@ -5465,7 +5558,7 @@
               </a:spcAft>
             </a:pPr>
             <a:r>
-              <a:rPr sz="1200" b="0">
+              <a:rPr sz="1050" b="0">
                 <a:solidFill>
                   <a:srgbClr val="1A1A1A"/>
                 </a:solidFill>
@@ -5484,8 +5577,8 @@
         </p:nvSpPr>
         <p:spPr>
           <a:xfrm>
-            <a:off x="841248" y="2999232"/>
-            <a:ext cx="5715000" cy="530352"/>
+            <a:off x="841248" y="2944368"/>
+            <a:ext cx="4160520" cy="475488"/>
           </a:xfrm>
           <a:prstGeom prst="roundRect">
             <a:avLst>
@@ -5540,8 +5633,8 @@
         </p:blipFill>
         <p:spPr>
           <a:xfrm>
-            <a:off x="987552" y="3145536"/>
-            <a:ext cx="237744" cy="237744"/>
+            <a:off x="969264" y="3081528"/>
+            <a:ext cx="201168" cy="201168"/>
           </a:xfrm>
           <a:prstGeom prst="rect">
             <a:avLst/>
@@ -5556,8 +5649,8 @@
         </p:nvSpPr>
         <p:spPr>
           <a:xfrm>
-            <a:off x="1353312" y="2999232"/>
-            <a:ext cx="5029200" cy="530352"/>
+            <a:off x="1280160" y="2944368"/>
+            <a:ext cx="3593591" cy="475488"/>
           </a:xfrm>
           <a:prstGeom prst="rect">
             <a:avLst/>
@@ -5582,7 +5675,7 @@
               </a:spcAft>
             </a:pPr>
             <a:r>
-              <a:rPr sz="1200" b="0">
+              <a:rPr sz="1050" b="0">
                 <a:solidFill>
                   <a:srgbClr val="1A1A1A"/>
                 </a:solidFill>
@@ -5601,8 +5694,8 @@
         </p:nvSpPr>
         <p:spPr>
           <a:xfrm>
-            <a:off x="841248" y="3602736"/>
-            <a:ext cx="5715000" cy="530352"/>
+            <a:off x="841248" y="3493008"/>
+            <a:ext cx="4160520" cy="475488"/>
           </a:xfrm>
           <a:prstGeom prst="roundRect">
             <a:avLst>
@@ -5657,8 +5750,8 @@
         </p:blipFill>
         <p:spPr>
           <a:xfrm>
-            <a:off x="987552" y="3749040"/>
-            <a:ext cx="237744" cy="237744"/>
+            <a:off x="969264" y="3630168"/>
+            <a:ext cx="201168" cy="201168"/>
           </a:xfrm>
           <a:prstGeom prst="rect">
             <a:avLst/>
@@ -5673,8 +5766,8 @@
         </p:nvSpPr>
         <p:spPr>
           <a:xfrm>
-            <a:off x="1353312" y="3602736"/>
-            <a:ext cx="5029200" cy="530352"/>
+            <a:off x="1280160" y="3493008"/>
+            <a:ext cx="3593591" cy="475488"/>
           </a:xfrm>
           <a:prstGeom prst="rect">
             <a:avLst/>
@@ -5699,7 +5792,7 @@
               </a:spcAft>
             </a:pPr>
             <a:r>
-              <a:rPr sz="1200" b="0">
+              <a:rPr sz="1050" b="0">
                 <a:solidFill>
                   <a:srgbClr val="1A1A1A"/>
                 </a:solidFill>
@@ -5718,8 +5811,8 @@
         </p:nvSpPr>
         <p:spPr>
           <a:xfrm>
-            <a:off x="841248" y="4206240"/>
-            <a:ext cx="5715000" cy="530352"/>
+            <a:off x="841248" y="4041648"/>
+            <a:ext cx="4160520" cy="475488"/>
           </a:xfrm>
           <a:prstGeom prst="roundRect">
             <a:avLst>
@@ -5774,8 +5867,8 @@
         </p:blipFill>
         <p:spPr>
           <a:xfrm>
-            <a:off x="987552" y="4352544"/>
-            <a:ext cx="237744" cy="237744"/>
+            <a:off x="969264" y="4178807"/>
+            <a:ext cx="201168" cy="201168"/>
           </a:xfrm>
           <a:prstGeom prst="rect">
             <a:avLst/>
@@ -5790,8 +5883,8 @@
         </p:nvSpPr>
         <p:spPr>
           <a:xfrm>
-            <a:off x="1353312" y="4206240"/>
-            <a:ext cx="5029200" cy="530352"/>
+            <a:off x="1280160" y="4041648"/>
+            <a:ext cx="3593591" cy="475488"/>
           </a:xfrm>
           <a:prstGeom prst="rect">
             <a:avLst/>
@@ -5816,7 +5909,7 @@
               </a:spcAft>
             </a:pPr>
             <a:r>
-              <a:rPr sz="1200" b="0">
+              <a:rPr sz="1050" b="0">
                 <a:solidFill>
                   <a:srgbClr val="1A1A1A"/>
                 </a:solidFill>
@@ -5835,8 +5928,8 @@
         </p:nvSpPr>
         <p:spPr>
           <a:xfrm>
-            <a:off x="841248" y="4809744"/>
-            <a:ext cx="5715000" cy="530352"/>
+            <a:off x="841248" y="4590288"/>
+            <a:ext cx="4160520" cy="475488"/>
           </a:xfrm>
           <a:prstGeom prst="roundRect">
             <a:avLst>
@@ -5891,8 +5984,8 @@
         </p:blipFill>
         <p:spPr>
           <a:xfrm>
-            <a:off x="987552" y="4956048"/>
-            <a:ext cx="237744" cy="237744"/>
+            <a:off x="969264" y="4727447"/>
+            <a:ext cx="201168" cy="201168"/>
           </a:xfrm>
           <a:prstGeom prst="rect">
             <a:avLst/>
@@ -5907,8 +6000,8 @@
         </p:nvSpPr>
         <p:spPr>
           <a:xfrm>
-            <a:off x="1353312" y="4809744"/>
-            <a:ext cx="5029200" cy="530352"/>
+            <a:off x="1280160" y="4590288"/>
+            <a:ext cx="3593591" cy="475488"/>
           </a:xfrm>
           <a:prstGeom prst="rect">
             <a:avLst/>
@@ -5933,7 +6026,7 @@
               </a:spcAft>
             </a:pPr>
             <a:r>
-              <a:rPr sz="1200" b="0">
+              <a:rPr sz="1050" b="0">
                 <a:solidFill>
                   <a:srgbClr val="1A1A1A"/>
                 </a:solidFill>
@@ -5952,8 +6045,8 @@
         </p:nvSpPr>
         <p:spPr>
           <a:xfrm>
-            <a:off x="6812280" y="2395728"/>
-            <a:ext cx="4538167" cy="2944368"/>
+            <a:off x="5385816" y="2395728"/>
+            <a:ext cx="5964631" cy="2806023"/>
           </a:xfrm>
           <a:prstGeom prst="roundRect">
             <a:avLst>
@@ -5992,100 +6085,9 @@
           </a:p>
         </p:txBody>
       </p:sp>
-      <p:sp>
-        <p:nvSpPr>
-          <p:cNvPr id="22" name="Rounded Rectangle 21"/>
-          <p:cNvSpPr/>
-          <p:nvPr/>
-        </p:nvSpPr>
-        <p:spPr>
-          <a:xfrm>
-            <a:off x="7013448" y="2596896"/>
-            <a:ext cx="1298448" cy="310896"/>
-          </a:xfrm>
-          <a:prstGeom prst="roundRect">
-            <a:avLst>
-              <a:gd name="adj" fmla="val 50000"/>
-            </a:avLst>
-          </a:prstGeom>
-          <a:solidFill>
-            <a:srgbClr val="FCECEC"/>
-          </a:solidFill>
-          <a:ln>
-            <a:noFill/>
-          </a:ln>
-          <a:effectLst/>
-        </p:spPr>
-        <p:style>
-          <a:lnRef idx="1">
-            <a:schemeClr val="accent1"/>
-          </a:lnRef>
-          <a:fillRef idx="3">
-            <a:schemeClr val="accent1"/>
-          </a:fillRef>
-          <a:effectRef idx="2">
-            <a:schemeClr val="accent1"/>
-          </a:effectRef>
-          <a:fontRef idx="minor">
-            <a:schemeClr val="lt1"/>
-          </a:fontRef>
-        </p:style>
-        <p:txBody>
-          <a:bodyPr rtlCol="0" anchor="ctr"/>
-          <a:lstStyle/>
-          <a:p>
-            <a:pPr algn="ctr"/>
-          </a:p>
-        </p:txBody>
-      </p:sp>
-      <p:sp>
-        <p:nvSpPr>
-          <p:cNvPr id="23" name="TextBox 22"/>
-          <p:cNvSpPr txBox="1"/>
-          <p:nvPr/>
-        </p:nvSpPr>
-        <p:spPr>
-          <a:xfrm>
-            <a:off x="7013448" y="2596896"/>
-            <a:ext cx="1298448" cy="310896"/>
-          </a:xfrm>
-          <a:prstGeom prst="rect">
-            <a:avLst/>
-          </a:prstGeom>
-          <a:noFill/>
-        </p:spPr>
-        <p:txBody>
-          <a:bodyPr wrap="none" anchor="ctr" lIns="0" rIns="0" tIns="0" bIns="0">
-            <a:spAutoFit/>
-          </a:bodyPr>
-          <a:lstStyle/>
-          <a:p>
-            <a:pPr algn="ctr">
-              <a:lnSpc>
-                <a:spcPct val="106000"/>
-              </a:lnSpc>
-              <a:spcBef>
-                <a:spcPts val="0"/>
-              </a:spcBef>
-              <a:spcAft>
-                <a:spcPts val="0"/>
-              </a:spcAft>
-            </a:pPr>
-            <a:r>
-              <a:rPr sz="850" b="1">
-                <a:solidFill>
-                  <a:srgbClr val="B80000"/>
-                </a:solidFill>
-                <a:latin typeface="Red Hat Display"/>
-              </a:rPr>
-              <a:t>MEDIA PASS</a:t>
-            </a:r>
-          </a:p>
-        </p:txBody>
-      </p:sp>
       <p:pic>
         <p:nvPicPr>
-          <p:cNvPr id="24" name="Picture 23" descr="eye_slate.png"/>
+          <p:cNvPr id="22" name="Picture 21" descr="01-agent-anatomy.png"/>
           <p:cNvPicPr>
             <a:picLocks noChangeAspect="1"/>
           </p:cNvPicPr>
@@ -6099,62 +6101,17 @@
         </p:blipFill>
         <p:spPr>
           <a:xfrm>
-            <a:off x="8843619" y="3108960"/>
-            <a:ext cx="475488" cy="475488"/>
+            <a:off x="5532120" y="2542032"/>
+            <a:ext cx="5672023" cy="2513415"/>
           </a:xfrm>
           <a:prstGeom prst="rect">
             <a:avLst/>
           </a:prstGeom>
         </p:spPr>
       </p:pic>
-      <p:sp>
-        <p:nvSpPr>
-          <p:cNvPr id="25" name="TextBox 24"/>
-          <p:cNvSpPr txBox="1"/>
-          <p:nvPr/>
-        </p:nvSpPr>
-        <p:spPr>
-          <a:xfrm>
-            <a:off x="7050024" y="3721608"/>
-            <a:ext cx="4062679" cy="1481328"/>
-          </a:xfrm>
-          <a:prstGeom prst="rect">
-            <a:avLst/>
-          </a:prstGeom>
-          <a:noFill/>
-        </p:spPr>
-        <p:txBody>
-          <a:bodyPr wrap="square" anchor="t" lIns="0" rIns="0" tIns="0" bIns="0">
-            <a:spAutoFit/>
-          </a:bodyPr>
-          <a:lstStyle/>
-          <a:p>
-            <a:pPr algn="l">
-              <a:lnSpc>
-                <a:spcPct val="120000"/>
-              </a:lnSpc>
-              <a:spcBef>
-                <a:spcPts val="0"/>
-              </a:spcBef>
-              <a:spcAft>
-                <a:spcPts val="0"/>
-              </a:spcAft>
-            </a:pPr>
-            <a:r>
-              <a:rPr sz="950" b="0">
-                <a:solidFill>
-                  <a:srgbClr val="8A9099"/>
-                </a:solidFill>
-                <a:latin typeface="Red Hat Text"/>
-              </a:rPr>
-              <a:t>The concept diagram agentic-ai-01-agent-anatomy.svg — a rounded "parasol-agent" box containing four labelled parts (Model, Instructions, Tools, Memory), a question arrow in, and a "grounded answer + which tools it called + tokens" arrow out; the Tools part connects out to the two MCP servers.</a:t>
-            </a:r>
-          </a:p>
-        </p:txBody>
-      </p:sp>
       <p:cxnSp>
         <p:nvCxnSpPr>
-          <p:cNvPr id="26" name="Connector 25"/>
+          <p:cNvPr id="23" name="Connector 22"/>
           <p:cNvCxnSpPr/>
           <p:nvPr/>
         </p:nvCxnSpPr>
@@ -6190,7 +6147,7 @@
       </p:cxnSp>
       <p:sp>
         <p:nvSpPr>
-          <p:cNvPr id="27" name="TextBox 26"/>
+          <p:cNvPr id="24" name="TextBox 23"/>
           <p:cNvSpPr txBox="1"/>
           <p:nvPr/>
         </p:nvSpPr>
@@ -6235,7 +6192,7 @@
       </p:sp>
       <p:sp>
         <p:nvSpPr>
-          <p:cNvPr id="28" name="TextBox 27"/>
+          <p:cNvPr id="25" name="TextBox 24"/>
           <p:cNvSpPr txBox="1"/>
           <p:nvPr/>
         </p:nvSpPr>
@@ -6455,7 +6412,7 @@
         <p:spPr>
           <a:xfrm>
             <a:off x="841248" y="2395728"/>
-            <a:ext cx="5715000" cy="530352"/>
+            <a:ext cx="4160520" cy="475488"/>
           </a:xfrm>
           <a:prstGeom prst="roundRect">
             <a:avLst>
@@ -6510,8 +6467,8 @@
         </p:blipFill>
         <p:spPr>
           <a:xfrm>
-            <a:off x="987552" y="2542032"/>
-            <a:ext cx="237744" cy="237744"/>
+            <a:off x="969264" y="2532888"/>
+            <a:ext cx="201168" cy="201168"/>
           </a:xfrm>
           <a:prstGeom prst="rect">
             <a:avLst/>
@@ -6526,8 +6483,8 @@
         </p:nvSpPr>
         <p:spPr>
           <a:xfrm>
-            <a:off x="1353312" y="2395728"/>
-            <a:ext cx="5029200" cy="530352"/>
+            <a:off x="1280160" y="2395728"/>
+            <a:ext cx="3593591" cy="475488"/>
           </a:xfrm>
           <a:prstGeom prst="rect">
             <a:avLst/>
@@ -6552,7 +6509,7 @@
               </a:spcAft>
             </a:pPr>
             <a:r>
-              <a:rPr sz="1200" b="0">
+              <a:rPr sz="1050" b="0">
                 <a:solidFill>
                   <a:srgbClr val="1A1A1A"/>
                 </a:solidFill>
@@ -6571,8 +6528,8 @@
         </p:nvSpPr>
         <p:spPr>
           <a:xfrm>
-            <a:off x="841248" y="2999232"/>
-            <a:ext cx="5715000" cy="530352"/>
+            <a:off x="841248" y="2944368"/>
+            <a:ext cx="4160520" cy="475488"/>
           </a:xfrm>
           <a:prstGeom prst="roundRect">
             <a:avLst>
@@ -6627,8 +6584,8 @@
         </p:blipFill>
         <p:spPr>
           <a:xfrm>
-            <a:off x="987552" y="3145536"/>
-            <a:ext cx="237744" cy="237744"/>
+            <a:off x="969264" y="3081528"/>
+            <a:ext cx="201168" cy="201168"/>
           </a:xfrm>
           <a:prstGeom prst="rect">
             <a:avLst/>
@@ -6643,8 +6600,8 @@
         </p:nvSpPr>
         <p:spPr>
           <a:xfrm>
-            <a:off x="1353312" y="2999232"/>
-            <a:ext cx="5029200" cy="530352"/>
+            <a:off x="1280160" y="2944368"/>
+            <a:ext cx="3593591" cy="475488"/>
           </a:xfrm>
           <a:prstGeom prst="rect">
             <a:avLst/>
@@ -6669,7 +6626,7 @@
               </a:spcAft>
             </a:pPr>
             <a:r>
-              <a:rPr sz="1200" b="0">
+              <a:rPr sz="1050" b="0">
                 <a:solidFill>
                   <a:srgbClr val="1A1A1A"/>
                 </a:solidFill>
@@ -6688,8 +6645,8 @@
         </p:nvSpPr>
         <p:spPr>
           <a:xfrm>
-            <a:off x="841248" y="3602736"/>
-            <a:ext cx="5715000" cy="530352"/>
+            <a:off x="841248" y="3493008"/>
+            <a:ext cx="4160520" cy="475488"/>
           </a:xfrm>
           <a:prstGeom prst="roundRect">
             <a:avLst>
@@ -6744,8 +6701,8 @@
         </p:blipFill>
         <p:spPr>
           <a:xfrm>
-            <a:off x="987552" y="3749040"/>
-            <a:ext cx="237744" cy="237744"/>
+            <a:off x="969264" y="3630168"/>
+            <a:ext cx="201168" cy="201168"/>
           </a:xfrm>
           <a:prstGeom prst="rect">
             <a:avLst/>
@@ -6760,8 +6717,8 @@
         </p:nvSpPr>
         <p:spPr>
           <a:xfrm>
-            <a:off x="1353312" y="3602736"/>
-            <a:ext cx="5029200" cy="530352"/>
+            <a:off x="1280160" y="3493008"/>
+            <a:ext cx="3593591" cy="475488"/>
           </a:xfrm>
           <a:prstGeom prst="rect">
             <a:avLst/>
@@ -6786,7 +6743,7 @@
               </a:spcAft>
             </a:pPr>
             <a:r>
-              <a:rPr sz="1200" b="0">
+              <a:rPr sz="1050" b="0">
                 <a:solidFill>
                   <a:srgbClr val="1A1A1A"/>
                 </a:solidFill>
@@ -6805,8 +6762,8 @@
         </p:nvSpPr>
         <p:spPr>
           <a:xfrm>
-            <a:off x="841248" y="4206240"/>
-            <a:ext cx="5715000" cy="530352"/>
+            <a:off x="841248" y="4041648"/>
+            <a:ext cx="4160520" cy="475488"/>
           </a:xfrm>
           <a:prstGeom prst="roundRect">
             <a:avLst>
@@ -6861,8 +6818,8 @@
         </p:blipFill>
         <p:spPr>
           <a:xfrm>
-            <a:off x="987552" y="4352544"/>
-            <a:ext cx="237744" cy="237744"/>
+            <a:off x="969264" y="4178807"/>
+            <a:ext cx="201168" cy="201168"/>
           </a:xfrm>
           <a:prstGeom prst="rect">
             <a:avLst/>
@@ -6877,8 +6834,8 @@
         </p:nvSpPr>
         <p:spPr>
           <a:xfrm>
-            <a:off x="1353312" y="4206240"/>
-            <a:ext cx="5029200" cy="530352"/>
+            <a:off x="1280160" y="4041648"/>
+            <a:ext cx="3593591" cy="475488"/>
           </a:xfrm>
           <a:prstGeom prst="rect">
             <a:avLst/>
@@ -6903,7 +6860,7 @@
               </a:spcAft>
             </a:pPr>
             <a:r>
-              <a:rPr sz="1200" b="0">
+              <a:rPr sz="1050" b="0">
                 <a:solidFill>
                   <a:srgbClr val="1A1A1A"/>
                 </a:solidFill>
@@ -6922,8 +6879,8 @@
         </p:nvSpPr>
         <p:spPr>
           <a:xfrm>
-            <a:off x="841248" y="4809744"/>
-            <a:ext cx="5715000" cy="530352"/>
+            <a:off x="841248" y="4590288"/>
+            <a:ext cx="4160520" cy="475488"/>
           </a:xfrm>
           <a:prstGeom prst="roundRect">
             <a:avLst>
@@ -6978,8 +6935,8 @@
         </p:blipFill>
         <p:spPr>
           <a:xfrm>
-            <a:off x="987552" y="4956048"/>
-            <a:ext cx="237744" cy="237744"/>
+            <a:off x="969264" y="4727447"/>
+            <a:ext cx="201168" cy="201168"/>
           </a:xfrm>
           <a:prstGeom prst="rect">
             <a:avLst/>
@@ -6994,8 +6951,8 @@
         </p:nvSpPr>
         <p:spPr>
           <a:xfrm>
-            <a:off x="1353312" y="4809744"/>
-            <a:ext cx="5029200" cy="530352"/>
+            <a:off x="1280160" y="4590288"/>
+            <a:ext cx="3593591" cy="475488"/>
           </a:xfrm>
           <a:prstGeom prst="rect">
             <a:avLst/>
@@ -7020,7 +6977,7 @@
               </a:spcAft>
             </a:pPr>
             <a:r>
-              <a:rPr sz="1200" b="0">
+              <a:rPr sz="1050" b="0">
                 <a:solidFill>
                   <a:srgbClr val="1A1A1A"/>
                 </a:solidFill>
@@ -7039,8 +6996,8 @@
         </p:nvSpPr>
         <p:spPr>
           <a:xfrm>
-            <a:off x="6812280" y="2395728"/>
-            <a:ext cx="4538167" cy="2944368"/>
+            <a:off x="5385816" y="2442306"/>
+            <a:ext cx="5964631" cy="2650042"/>
           </a:xfrm>
           <a:prstGeom prst="roundRect">
             <a:avLst>
@@ -7079,100 +7036,9 @@
           </a:p>
         </p:txBody>
       </p:sp>
-      <p:sp>
-        <p:nvSpPr>
-          <p:cNvPr id="22" name="Rounded Rectangle 21"/>
-          <p:cNvSpPr/>
-          <p:nvPr/>
-        </p:nvSpPr>
-        <p:spPr>
-          <a:xfrm>
-            <a:off x="7013448" y="2596896"/>
-            <a:ext cx="1298448" cy="310896"/>
-          </a:xfrm>
-          <a:prstGeom prst="roundRect">
-            <a:avLst>
-              <a:gd name="adj" fmla="val 50000"/>
-            </a:avLst>
-          </a:prstGeom>
-          <a:solidFill>
-            <a:srgbClr val="FCECEC"/>
-          </a:solidFill>
-          <a:ln>
-            <a:noFill/>
-          </a:ln>
-          <a:effectLst/>
-        </p:spPr>
-        <p:style>
-          <a:lnRef idx="1">
-            <a:schemeClr val="accent1"/>
-          </a:lnRef>
-          <a:fillRef idx="3">
-            <a:schemeClr val="accent1"/>
-          </a:fillRef>
-          <a:effectRef idx="2">
-            <a:schemeClr val="accent1"/>
-          </a:effectRef>
-          <a:fontRef idx="minor">
-            <a:schemeClr val="lt1"/>
-          </a:fontRef>
-        </p:style>
-        <p:txBody>
-          <a:bodyPr rtlCol="0" anchor="ctr"/>
-          <a:lstStyle/>
-          <a:p>
-            <a:pPr algn="ctr"/>
-          </a:p>
-        </p:txBody>
-      </p:sp>
-      <p:sp>
-        <p:nvSpPr>
-          <p:cNvPr id="23" name="TextBox 22"/>
-          <p:cNvSpPr txBox="1"/>
-          <p:nvPr/>
-        </p:nvSpPr>
-        <p:spPr>
-          <a:xfrm>
-            <a:off x="7013448" y="2596896"/>
-            <a:ext cx="1298448" cy="310896"/>
-          </a:xfrm>
-          <a:prstGeom prst="rect">
-            <a:avLst/>
-          </a:prstGeom>
-          <a:noFill/>
-        </p:spPr>
-        <p:txBody>
-          <a:bodyPr wrap="none" anchor="ctr" lIns="0" rIns="0" tIns="0" bIns="0">
-            <a:spAutoFit/>
-          </a:bodyPr>
-          <a:lstStyle/>
-          <a:p>
-            <a:pPr algn="ctr">
-              <a:lnSpc>
-                <a:spcPct val="106000"/>
-              </a:lnSpc>
-              <a:spcBef>
-                <a:spcPts val="0"/>
-              </a:spcBef>
-              <a:spcAft>
-                <a:spcPts val="0"/>
-              </a:spcAft>
-            </a:pPr>
-            <a:r>
-              <a:rPr sz="850" b="1">
-                <a:solidFill>
-                  <a:srgbClr val="B80000"/>
-                </a:solidFill>
-                <a:latin typeface="Red Hat Display"/>
-              </a:rPr>
-              <a:t>MEDIA PASS</a:t>
-            </a:r>
-          </a:p>
-        </p:txBody>
-      </p:sp>
       <p:pic>
         <p:nvPicPr>
-          <p:cNvPr id="24" name="Picture 23" descr="eye_slate.png"/>
+          <p:cNvPr id="22" name="Picture 21" descr="02-mcp-tools.png"/>
           <p:cNvPicPr>
             <a:picLocks noChangeAspect="1"/>
           </p:cNvPicPr>
@@ -7186,62 +7052,17 @@
         </p:blipFill>
         <p:spPr>
           <a:xfrm>
-            <a:off x="8843619" y="3108960"/>
-            <a:ext cx="475488" cy="475488"/>
+            <a:off x="5532120" y="2588610"/>
+            <a:ext cx="5672023" cy="2357434"/>
           </a:xfrm>
           <a:prstGeom prst="rect">
             <a:avLst/>
           </a:prstGeom>
         </p:spPr>
       </p:pic>
-      <p:sp>
-        <p:nvSpPr>
-          <p:cNvPr id="25" name="TextBox 24"/>
-          <p:cNvSpPr txBox="1"/>
-          <p:nvPr/>
-        </p:nvSpPr>
-        <p:spPr>
-          <a:xfrm>
-            <a:off x="7050024" y="3721608"/>
-            <a:ext cx="4062679" cy="1481328"/>
-          </a:xfrm>
-          <a:prstGeom prst="rect">
-            <a:avLst/>
-          </a:prstGeom>
-          <a:noFill/>
-        </p:spPr>
-        <p:txBody>
-          <a:bodyPr wrap="square" anchor="t" lIns="0" rIns="0" tIns="0" bIns="0">
-            <a:spAutoFit/>
-          </a:bodyPr>
-          <a:lstStyle/>
-          <a:p>
-            <a:pPr algn="l">
-              <a:lnSpc>
-                <a:spcPct val="120000"/>
-              </a:lnSpc>
-              <a:spcBef>
-                <a:spcPts val="0"/>
-              </a:spcBef>
-              <a:spcAft>
-                <a:spcPts val="0"/>
-              </a:spcAft>
-            </a:pPr>
-            <a:r>
-              <a:rPr sz="950" b="0">
-                <a:solidFill>
-                  <a:srgbClr val="8A9099"/>
-                </a:solidFill>
-                <a:latin typeface="Red Hat Text"/>
-              </a:rPr>
-              <a:t>The concept diagram agentic-ai-02-mcp-tools.svg — the user posting to parasol-agent (the MCP client) inside a namespace box; the agent making tool calls over HTTP-SSE to claims-db and policy-docs (each listing its tools) and a chat call out to the MaaS model endpoint. A caption strip: "a tool is just your service + a standard adapter."</a:t>
-            </a:r>
-          </a:p>
-        </p:txBody>
-      </p:sp>
       <p:cxnSp>
         <p:nvCxnSpPr>
-          <p:cNvPr id="26" name="Connector 25"/>
+          <p:cNvPr id="23" name="Connector 22"/>
           <p:cNvCxnSpPr/>
           <p:nvPr/>
         </p:nvCxnSpPr>
@@ -7277,7 +7098,7 @@
       </p:cxnSp>
       <p:sp>
         <p:nvSpPr>
-          <p:cNvPr id="27" name="TextBox 26"/>
+          <p:cNvPr id="24" name="TextBox 23"/>
           <p:cNvSpPr txBox="1"/>
           <p:nvPr/>
         </p:nvSpPr>
@@ -7322,7 +7143,7 @@
       </p:sp>
       <p:sp>
         <p:nvSpPr>
-          <p:cNvPr id="28" name="TextBox 27"/>
+          <p:cNvPr id="25" name="TextBox 24"/>
           <p:cNvSpPr txBox="1"/>
           <p:nvPr/>
         </p:nvSpPr>
@@ -7542,11 +7363,11 @@
         <p:spPr>
           <a:xfrm>
             <a:off x="841248" y="2395728"/>
-            <a:ext cx="5715000" cy="530352"/>
+            <a:ext cx="5138928" cy="786384"/>
           </a:xfrm>
           <a:prstGeom prst="roundRect">
             <a:avLst>
-              <a:gd name="adj" fmla="val 6000"/>
+              <a:gd name="adj" fmla="val 7000"/>
             </a:avLst>
           </a:prstGeom>
           <a:solidFill>
@@ -7581,9 +7402,55 @@
           </a:p>
         </p:txBody>
       </p:sp>
+      <p:sp>
+        <p:nvSpPr>
+          <p:cNvPr id="7" name="Rounded Rectangle 6"/>
+          <p:cNvSpPr/>
+          <p:nvPr/>
+        </p:nvSpPr>
+        <p:spPr>
+          <a:xfrm>
+            <a:off x="987552" y="2532888"/>
+            <a:ext cx="512064" cy="512064"/>
+          </a:xfrm>
+          <a:prstGeom prst="roundRect">
+            <a:avLst>
+              <a:gd name="adj" fmla="val 26000"/>
+            </a:avLst>
+          </a:prstGeom>
+          <a:solidFill>
+            <a:srgbClr val="EE0000"/>
+          </a:solidFill>
+          <a:ln>
+            <a:noFill/>
+          </a:ln>
+          <a:effectLst/>
+        </p:spPr>
+        <p:style>
+          <a:lnRef idx="1">
+            <a:schemeClr val="accent1"/>
+          </a:lnRef>
+          <a:fillRef idx="3">
+            <a:schemeClr val="accent1"/>
+          </a:fillRef>
+          <a:effectRef idx="2">
+            <a:schemeClr val="accent1"/>
+          </a:effectRef>
+          <a:fontRef idx="minor">
+            <a:schemeClr val="lt1"/>
+          </a:fontRef>
+        </p:style>
+        <p:txBody>
+          <a:bodyPr rtlCol="0" anchor="ctr"/>
+          <a:lstStyle/>
+          <a:p>
+            <a:pPr algn="ctr"/>
+          </a:p>
+        </p:txBody>
+      </p:sp>
       <p:pic>
         <p:nvPicPr>
-          <p:cNvPr id="7" name="Picture 6" descr="check_steel.png"/>
+          <p:cNvPr id="8" name="Picture 7" descr="check_white.png"/>
           <p:cNvPicPr>
             <a:picLocks noChangeAspect="1"/>
           </p:cNvPicPr>
@@ -7597,8 +7464,8 @@
         </p:blipFill>
         <p:spPr>
           <a:xfrm>
-            <a:off x="987552" y="2542032"/>
-            <a:ext cx="237744" cy="237744"/>
+            <a:off x="1110447" y="2655783"/>
+            <a:ext cx="266273" cy="266273"/>
           </a:xfrm>
           <a:prstGeom prst="rect">
             <a:avLst/>
@@ -7607,14 +7474,14 @@
       </p:pic>
       <p:sp>
         <p:nvSpPr>
-          <p:cNvPr id="8" name="TextBox 7"/>
+          <p:cNvPr id="9" name="TextBox 8"/>
           <p:cNvSpPr txBox="1"/>
           <p:nvPr/>
         </p:nvSpPr>
         <p:spPr>
           <a:xfrm>
-            <a:off x="1353312" y="2395728"/>
-            <a:ext cx="5029200" cy="530352"/>
+            <a:off x="1627632" y="2395728"/>
+            <a:ext cx="4206240" cy="786384"/>
           </a:xfrm>
           <a:prstGeom prst="rect">
             <a:avLst/>
@@ -7639,7 +7506,7 @@
               </a:spcAft>
             </a:pPr>
             <a:r>
-              <a:rPr sz="1200" b="0">
+              <a:rPr sz="1150" b="0">
                 <a:solidFill>
                   <a:srgbClr val="1A1A1A"/>
                 </a:solidFill>
@@ -7652,18 +7519,18 @@
       </p:sp>
       <p:sp>
         <p:nvSpPr>
-          <p:cNvPr id="9" name="Rounded Rectangle 8"/>
+          <p:cNvPr id="10" name="Rounded Rectangle 9"/>
           <p:cNvSpPr/>
           <p:nvPr/>
         </p:nvSpPr>
         <p:spPr>
           <a:xfrm>
-            <a:off x="841248" y="2999232"/>
-            <a:ext cx="5715000" cy="530352"/>
+            <a:off x="6254496" y="2395728"/>
+            <a:ext cx="5138928" cy="786384"/>
           </a:xfrm>
           <a:prstGeom prst="roundRect">
             <a:avLst>
-              <a:gd name="adj" fmla="val 6000"/>
+              <a:gd name="adj" fmla="val 7000"/>
             </a:avLst>
           </a:prstGeom>
           <a:solidFill>
@@ -7698,9 +7565,55 @@
           </a:p>
         </p:txBody>
       </p:sp>
+      <p:sp>
+        <p:nvSpPr>
+          <p:cNvPr id="11" name="Rounded Rectangle 10"/>
+          <p:cNvSpPr/>
+          <p:nvPr/>
+        </p:nvSpPr>
+        <p:spPr>
+          <a:xfrm>
+            <a:off x="6400800" y="2532888"/>
+            <a:ext cx="512064" cy="512064"/>
+          </a:xfrm>
+          <a:prstGeom prst="roundRect">
+            <a:avLst>
+              <a:gd name="adj" fmla="val 26000"/>
+            </a:avLst>
+          </a:prstGeom>
+          <a:solidFill>
+            <a:srgbClr val="EE0000"/>
+          </a:solidFill>
+          <a:ln>
+            <a:noFill/>
+          </a:ln>
+          <a:effectLst/>
+        </p:spPr>
+        <p:style>
+          <a:lnRef idx="1">
+            <a:schemeClr val="accent1"/>
+          </a:lnRef>
+          <a:fillRef idx="3">
+            <a:schemeClr val="accent1"/>
+          </a:fillRef>
+          <a:effectRef idx="2">
+            <a:schemeClr val="accent1"/>
+          </a:effectRef>
+          <a:fontRef idx="minor">
+            <a:schemeClr val="lt1"/>
+          </a:fontRef>
+        </p:style>
+        <p:txBody>
+          <a:bodyPr rtlCol="0" anchor="ctr"/>
+          <a:lstStyle/>
+          <a:p>
+            <a:pPr algn="ctr"/>
+          </a:p>
+        </p:txBody>
+      </p:sp>
       <p:pic>
         <p:nvPicPr>
-          <p:cNvPr id="10" name="Picture 9" descr="check_steel.png"/>
+          <p:cNvPr id="12" name="Picture 11" descr="check_white.png"/>
           <p:cNvPicPr>
             <a:picLocks noChangeAspect="1"/>
           </p:cNvPicPr>
@@ -7714,8 +7627,8 @@
         </p:blipFill>
         <p:spPr>
           <a:xfrm>
-            <a:off x="987552" y="3145536"/>
-            <a:ext cx="237744" cy="237744"/>
+            <a:off x="6523695" y="2655783"/>
+            <a:ext cx="266273" cy="266273"/>
           </a:xfrm>
           <a:prstGeom prst="rect">
             <a:avLst/>
@@ -7724,14 +7637,14 @@
       </p:pic>
       <p:sp>
         <p:nvSpPr>
-          <p:cNvPr id="11" name="TextBox 10"/>
+          <p:cNvPr id="13" name="TextBox 12"/>
           <p:cNvSpPr txBox="1"/>
           <p:nvPr/>
         </p:nvSpPr>
         <p:spPr>
           <a:xfrm>
-            <a:off x="1353312" y="2999232"/>
-            <a:ext cx="5029200" cy="530352"/>
+            <a:off x="7040880" y="2395728"/>
+            <a:ext cx="4206240" cy="786384"/>
           </a:xfrm>
           <a:prstGeom prst="rect">
             <a:avLst/>
@@ -7756,7 +7669,7 @@
               </a:spcAft>
             </a:pPr>
             <a:r>
-              <a:rPr sz="1200" b="0">
+              <a:rPr sz="1150" b="0">
                 <a:solidFill>
                   <a:srgbClr val="1A1A1A"/>
                 </a:solidFill>
@@ -7769,18 +7682,18 @@
       </p:sp>
       <p:sp>
         <p:nvSpPr>
-          <p:cNvPr id="12" name="Rounded Rectangle 11"/>
+          <p:cNvPr id="14" name="Rounded Rectangle 13"/>
           <p:cNvSpPr/>
           <p:nvPr/>
         </p:nvSpPr>
         <p:spPr>
           <a:xfrm>
-            <a:off x="841248" y="3602736"/>
-            <a:ext cx="5715000" cy="530352"/>
+            <a:off x="841248" y="3328416"/>
+            <a:ext cx="5138928" cy="786384"/>
           </a:xfrm>
           <a:prstGeom prst="roundRect">
             <a:avLst>
-              <a:gd name="adj" fmla="val 6000"/>
+              <a:gd name="adj" fmla="val 7000"/>
             </a:avLst>
           </a:prstGeom>
           <a:solidFill>
@@ -7815,9 +7728,55 @@
           </a:p>
         </p:txBody>
       </p:sp>
+      <p:sp>
+        <p:nvSpPr>
+          <p:cNvPr id="15" name="Rounded Rectangle 14"/>
+          <p:cNvSpPr/>
+          <p:nvPr/>
+        </p:nvSpPr>
+        <p:spPr>
+          <a:xfrm>
+            <a:off x="987552" y="3465576"/>
+            <a:ext cx="512064" cy="512064"/>
+          </a:xfrm>
+          <a:prstGeom prst="roundRect">
+            <a:avLst>
+              <a:gd name="adj" fmla="val 26000"/>
+            </a:avLst>
+          </a:prstGeom>
+          <a:solidFill>
+            <a:srgbClr val="EE0000"/>
+          </a:solidFill>
+          <a:ln>
+            <a:noFill/>
+          </a:ln>
+          <a:effectLst/>
+        </p:spPr>
+        <p:style>
+          <a:lnRef idx="1">
+            <a:schemeClr val="accent1"/>
+          </a:lnRef>
+          <a:fillRef idx="3">
+            <a:schemeClr val="accent1"/>
+          </a:fillRef>
+          <a:effectRef idx="2">
+            <a:schemeClr val="accent1"/>
+          </a:effectRef>
+          <a:fontRef idx="minor">
+            <a:schemeClr val="lt1"/>
+          </a:fontRef>
+        </p:style>
+        <p:txBody>
+          <a:bodyPr rtlCol="0" anchor="ctr"/>
+          <a:lstStyle/>
+          <a:p>
+            <a:pPr algn="ctr"/>
+          </a:p>
+        </p:txBody>
+      </p:sp>
       <p:pic>
         <p:nvPicPr>
-          <p:cNvPr id="13" name="Picture 12" descr="check_steel.png"/>
+          <p:cNvPr id="16" name="Picture 15" descr="check_white.png"/>
           <p:cNvPicPr>
             <a:picLocks noChangeAspect="1"/>
           </p:cNvPicPr>
@@ -7831,8 +7790,8 @@
         </p:blipFill>
         <p:spPr>
           <a:xfrm>
-            <a:off x="987552" y="3749040"/>
-            <a:ext cx="237744" cy="237744"/>
+            <a:off x="1110447" y="3588471"/>
+            <a:ext cx="266273" cy="266273"/>
           </a:xfrm>
           <a:prstGeom prst="rect">
             <a:avLst/>
@@ -7841,14 +7800,14 @@
       </p:pic>
       <p:sp>
         <p:nvSpPr>
-          <p:cNvPr id="14" name="TextBox 13"/>
+          <p:cNvPr id="17" name="TextBox 16"/>
           <p:cNvSpPr txBox="1"/>
           <p:nvPr/>
         </p:nvSpPr>
         <p:spPr>
           <a:xfrm>
-            <a:off x="1353312" y="3602736"/>
-            <a:ext cx="5029200" cy="530352"/>
+            <a:off x="1627632" y="3328416"/>
+            <a:ext cx="4206240" cy="786384"/>
           </a:xfrm>
           <a:prstGeom prst="rect">
             <a:avLst/>
@@ -7873,7 +7832,7 @@
               </a:spcAft>
             </a:pPr>
             <a:r>
-              <a:rPr sz="1200" b="0">
+              <a:rPr sz="1150" b="0">
                 <a:solidFill>
                   <a:srgbClr val="1A1A1A"/>
                 </a:solidFill>
@@ -7886,18 +7845,18 @@
       </p:sp>
       <p:sp>
         <p:nvSpPr>
-          <p:cNvPr id="15" name="Rounded Rectangle 14"/>
+          <p:cNvPr id="18" name="Rounded Rectangle 17"/>
           <p:cNvSpPr/>
           <p:nvPr/>
         </p:nvSpPr>
         <p:spPr>
           <a:xfrm>
-            <a:off x="841248" y="4206240"/>
-            <a:ext cx="5715000" cy="530352"/>
+            <a:off x="6254496" y="3328416"/>
+            <a:ext cx="5138928" cy="786384"/>
           </a:xfrm>
           <a:prstGeom prst="roundRect">
             <a:avLst>
-              <a:gd name="adj" fmla="val 6000"/>
+              <a:gd name="adj" fmla="val 7000"/>
             </a:avLst>
           </a:prstGeom>
           <a:solidFill>
@@ -7932,9 +7891,55 @@
           </a:p>
         </p:txBody>
       </p:sp>
+      <p:sp>
+        <p:nvSpPr>
+          <p:cNvPr id="19" name="Rounded Rectangle 18"/>
+          <p:cNvSpPr/>
+          <p:nvPr/>
+        </p:nvSpPr>
+        <p:spPr>
+          <a:xfrm>
+            <a:off x="6400800" y="3465576"/>
+            <a:ext cx="512064" cy="512064"/>
+          </a:xfrm>
+          <a:prstGeom prst="roundRect">
+            <a:avLst>
+              <a:gd name="adj" fmla="val 26000"/>
+            </a:avLst>
+          </a:prstGeom>
+          <a:solidFill>
+            <a:srgbClr val="EE0000"/>
+          </a:solidFill>
+          <a:ln>
+            <a:noFill/>
+          </a:ln>
+          <a:effectLst/>
+        </p:spPr>
+        <p:style>
+          <a:lnRef idx="1">
+            <a:schemeClr val="accent1"/>
+          </a:lnRef>
+          <a:fillRef idx="3">
+            <a:schemeClr val="accent1"/>
+          </a:fillRef>
+          <a:effectRef idx="2">
+            <a:schemeClr val="accent1"/>
+          </a:effectRef>
+          <a:fontRef idx="minor">
+            <a:schemeClr val="lt1"/>
+          </a:fontRef>
+        </p:style>
+        <p:txBody>
+          <a:bodyPr rtlCol="0" anchor="ctr"/>
+          <a:lstStyle/>
+          <a:p>
+            <a:pPr algn="ctr"/>
+          </a:p>
+        </p:txBody>
+      </p:sp>
       <p:pic>
         <p:nvPicPr>
-          <p:cNvPr id="16" name="Picture 15" descr="check_steel.png"/>
+          <p:cNvPr id="20" name="Picture 19" descr="check_white.png"/>
           <p:cNvPicPr>
             <a:picLocks noChangeAspect="1"/>
           </p:cNvPicPr>
@@ -7948,8 +7953,8 @@
         </p:blipFill>
         <p:spPr>
           <a:xfrm>
-            <a:off x="987552" y="4352544"/>
-            <a:ext cx="237744" cy="237744"/>
+            <a:off x="6523695" y="3588471"/>
+            <a:ext cx="266273" cy="266273"/>
           </a:xfrm>
           <a:prstGeom prst="rect">
             <a:avLst/>
@@ -7958,14 +7963,14 @@
       </p:pic>
       <p:sp>
         <p:nvSpPr>
-          <p:cNvPr id="17" name="TextBox 16"/>
+          <p:cNvPr id="21" name="TextBox 20"/>
           <p:cNvSpPr txBox="1"/>
           <p:nvPr/>
         </p:nvSpPr>
         <p:spPr>
           <a:xfrm>
-            <a:off x="1353312" y="4206240"/>
-            <a:ext cx="5029200" cy="530352"/>
+            <a:off x="7040880" y="3328416"/>
+            <a:ext cx="4206240" cy="786384"/>
           </a:xfrm>
           <a:prstGeom prst="rect">
             <a:avLst/>
@@ -7990,7 +7995,7 @@
               </a:spcAft>
             </a:pPr>
             <a:r>
-              <a:rPr sz="1200" b="0">
+              <a:rPr sz="1150" b="0">
                 <a:solidFill>
                   <a:srgbClr val="1A1A1A"/>
                 </a:solidFill>
@@ -8003,18 +8008,18 @@
       </p:sp>
       <p:sp>
         <p:nvSpPr>
-          <p:cNvPr id="18" name="Rounded Rectangle 17"/>
+          <p:cNvPr id="22" name="Rounded Rectangle 21"/>
           <p:cNvSpPr/>
           <p:nvPr/>
         </p:nvSpPr>
         <p:spPr>
           <a:xfrm>
-            <a:off x="841248" y="4809744"/>
-            <a:ext cx="5715000" cy="530352"/>
+            <a:off x="841248" y="4261104"/>
+            <a:ext cx="5138928" cy="786384"/>
           </a:xfrm>
           <a:prstGeom prst="roundRect">
             <a:avLst>
-              <a:gd name="adj" fmla="val 6000"/>
+              <a:gd name="adj" fmla="val 7000"/>
             </a:avLst>
           </a:prstGeom>
           <a:solidFill>
@@ -8049,9 +8054,55 @@
           </a:p>
         </p:txBody>
       </p:sp>
+      <p:sp>
+        <p:nvSpPr>
+          <p:cNvPr id="23" name="Rounded Rectangle 22"/>
+          <p:cNvSpPr/>
+          <p:nvPr/>
+        </p:nvSpPr>
+        <p:spPr>
+          <a:xfrm>
+            <a:off x="987552" y="4398264"/>
+            <a:ext cx="512064" cy="512064"/>
+          </a:xfrm>
+          <a:prstGeom prst="roundRect">
+            <a:avLst>
+              <a:gd name="adj" fmla="val 26000"/>
+            </a:avLst>
+          </a:prstGeom>
+          <a:solidFill>
+            <a:srgbClr val="EE0000"/>
+          </a:solidFill>
+          <a:ln>
+            <a:noFill/>
+          </a:ln>
+          <a:effectLst/>
+        </p:spPr>
+        <p:style>
+          <a:lnRef idx="1">
+            <a:schemeClr val="accent1"/>
+          </a:lnRef>
+          <a:fillRef idx="3">
+            <a:schemeClr val="accent1"/>
+          </a:fillRef>
+          <a:effectRef idx="2">
+            <a:schemeClr val="accent1"/>
+          </a:effectRef>
+          <a:fontRef idx="minor">
+            <a:schemeClr val="lt1"/>
+          </a:fontRef>
+        </p:style>
+        <p:txBody>
+          <a:bodyPr rtlCol="0" anchor="ctr"/>
+          <a:lstStyle/>
+          <a:p>
+            <a:pPr algn="ctr"/>
+          </a:p>
+        </p:txBody>
+      </p:sp>
       <p:pic>
         <p:nvPicPr>
-          <p:cNvPr id="19" name="Picture 18" descr="check_steel.png"/>
+          <p:cNvPr id="24" name="Picture 23" descr="check_white.png"/>
           <p:cNvPicPr>
             <a:picLocks noChangeAspect="1"/>
           </p:cNvPicPr>
@@ -8065,8 +8116,8 @@
         </p:blipFill>
         <p:spPr>
           <a:xfrm>
-            <a:off x="987552" y="4956048"/>
-            <a:ext cx="237744" cy="237744"/>
+            <a:off x="1110447" y="4521159"/>
+            <a:ext cx="266273" cy="266273"/>
           </a:xfrm>
           <a:prstGeom prst="rect">
             <a:avLst/>
@@ -8075,14 +8126,14 @@
       </p:pic>
       <p:sp>
         <p:nvSpPr>
-          <p:cNvPr id="20" name="TextBox 19"/>
+          <p:cNvPr id="25" name="TextBox 24"/>
           <p:cNvSpPr txBox="1"/>
           <p:nvPr/>
         </p:nvSpPr>
         <p:spPr>
           <a:xfrm>
-            <a:off x="1353312" y="4809744"/>
-            <a:ext cx="5029200" cy="530352"/>
+            <a:off x="1627632" y="4261104"/>
+            <a:ext cx="4206240" cy="786384"/>
           </a:xfrm>
           <a:prstGeom prst="rect">
             <a:avLst/>
@@ -8107,221 +8158,13 @@
               </a:spcAft>
             </a:pPr>
             <a:r>
-              <a:rPr sz="1200" b="0">
+              <a:rPr sz="1150" b="0">
                 <a:solidFill>
                   <a:srgbClr val="1A1A1A"/>
                 </a:solidFill>
                 <a:latin typeface="Red Hat Text"/>
               </a:rPr>
               <a:t>Same claim, terse vs imperative: ungrounded text-echo → grounded tool call</a:t>
-            </a:r>
-          </a:p>
-        </p:txBody>
-      </p:sp>
-      <p:sp>
-        <p:nvSpPr>
-          <p:cNvPr id="21" name="Rounded Rectangle 20"/>
-          <p:cNvSpPr/>
-          <p:nvPr/>
-        </p:nvSpPr>
-        <p:spPr>
-          <a:xfrm>
-            <a:off x="6812280" y="2395728"/>
-            <a:ext cx="4538167" cy="2944368"/>
-          </a:xfrm>
-          <a:prstGeom prst="roundRect">
-            <a:avLst>
-              <a:gd name="adj" fmla="val 4000"/>
-            </a:avLst>
-          </a:prstGeom>
-          <a:solidFill>
-            <a:srgbClr val="FFFFFF"/>
-          </a:solidFill>
-          <a:ln w="15240">
-            <a:solidFill>
-              <a:srgbClr val="DDE1E6"/>
-            </a:solidFill>
-          </a:ln>
-          <a:effectLst/>
-        </p:spPr>
-        <p:style>
-          <a:lnRef idx="1">
-            <a:schemeClr val="accent1"/>
-          </a:lnRef>
-          <a:fillRef idx="3">
-            <a:schemeClr val="accent1"/>
-          </a:fillRef>
-          <a:effectRef idx="2">
-            <a:schemeClr val="accent1"/>
-          </a:effectRef>
-          <a:fontRef idx="minor">
-            <a:schemeClr val="lt1"/>
-          </a:fontRef>
-        </p:style>
-        <p:txBody>
-          <a:bodyPr rtlCol="0" anchor="ctr"/>
-          <a:lstStyle/>
-          <a:p>
-            <a:pPr algn="ctr"/>
-          </a:p>
-        </p:txBody>
-      </p:sp>
-      <p:sp>
-        <p:nvSpPr>
-          <p:cNvPr id="22" name="Rounded Rectangle 21"/>
-          <p:cNvSpPr/>
-          <p:nvPr/>
-        </p:nvSpPr>
-        <p:spPr>
-          <a:xfrm>
-            <a:off x="7013448" y="2596896"/>
-            <a:ext cx="1298448" cy="310896"/>
-          </a:xfrm>
-          <a:prstGeom prst="roundRect">
-            <a:avLst>
-              <a:gd name="adj" fmla="val 50000"/>
-            </a:avLst>
-          </a:prstGeom>
-          <a:solidFill>
-            <a:srgbClr val="FCECEC"/>
-          </a:solidFill>
-          <a:ln>
-            <a:noFill/>
-          </a:ln>
-          <a:effectLst/>
-        </p:spPr>
-        <p:style>
-          <a:lnRef idx="1">
-            <a:schemeClr val="accent1"/>
-          </a:lnRef>
-          <a:fillRef idx="3">
-            <a:schemeClr val="accent1"/>
-          </a:fillRef>
-          <a:effectRef idx="2">
-            <a:schemeClr val="accent1"/>
-          </a:effectRef>
-          <a:fontRef idx="minor">
-            <a:schemeClr val="lt1"/>
-          </a:fontRef>
-        </p:style>
-        <p:txBody>
-          <a:bodyPr rtlCol="0" anchor="ctr"/>
-          <a:lstStyle/>
-          <a:p>
-            <a:pPr algn="ctr"/>
-          </a:p>
-        </p:txBody>
-      </p:sp>
-      <p:sp>
-        <p:nvSpPr>
-          <p:cNvPr id="23" name="TextBox 22"/>
-          <p:cNvSpPr txBox="1"/>
-          <p:nvPr/>
-        </p:nvSpPr>
-        <p:spPr>
-          <a:xfrm>
-            <a:off x="7013448" y="2596896"/>
-            <a:ext cx="1298448" cy="310896"/>
-          </a:xfrm>
-          <a:prstGeom prst="rect">
-            <a:avLst/>
-          </a:prstGeom>
-          <a:noFill/>
-        </p:spPr>
-        <p:txBody>
-          <a:bodyPr wrap="none" anchor="ctr" lIns="0" rIns="0" tIns="0" bIns="0">
-            <a:spAutoFit/>
-          </a:bodyPr>
-          <a:lstStyle/>
-          <a:p>
-            <a:pPr algn="ctr">
-              <a:lnSpc>
-                <a:spcPct val="106000"/>
-              </a:lnSpc>
-              <a:spcBef>
-                <a:spcPts val="0"/>
-              </a:spcBef>
-              <a:spcAft>
-                <a:spcPts val="0"/>
-              </a:spcAft>
-            </a:pPr>
-            <a:r>
-              <a:rPr sz="850" b="1">
-                <a:solidFill>
-                  <a:srgbClr val="B80000"/>
-                </a:solidFill>
-                <a:latin typeface="Red Hat Display"/>
-              </a:rPr>
-              <a:t>MEDIA PASS</a:t>
-            </a:r>
-          </a:p>
-        </p:txBody>
-      </p:sp>
-      <p:pic>
-        <p:nvPicPr>
-          <p:cNvPr id="24" name="Picture 23" descr="eye_slate.png"/>
-          <p:cNvPicPr>
-            <a:picLocks noChangeAspect="1"/>
-          </p:cNvPicPr>
-          <p:nvPr/>
-        </p:nvPicPr>
-        <p:blipFill>
-          <a:blip r:embed="rId4"/>
-          <a:stretch>
-            <a:fillRect/>
-          </a:stretch>
-        </p:blipFill>
-        <p:spPr>
-          <a:xfrm>
-            <a:off x="8843619" y="3108960"/>
-            <a:ext cx="475488" cy="475488"/>
-          </a:xfrm>
-          <a:prstGeom prst="rect">
-            <a:avLst/>
-          </a:prstGeom>
-        </p:spPr>
-      </p:pic>
-      <p:sp>
-        <p:nvSpPr>
-          <p:cNvPr id="25" name="TextBox 24"/>
-          <p:cNvSpPr txBox="1"/>
-          <p:nvPr/>
-        </p:nvSpPr>
-        <p:spPr>
-          <a:xfrm>
-            <a:off x="7050024" y="3721608"/>
-            <a:ext cx="4062679" cy="1481328"/>
-          </a:xfrm>
-          <a:prstGeom prst="rect">
-            <a:avLst/>
-          </a:prstGeom>
-          <a:noFill/>
-        </p:spPr>
-        <p:txBody>
-          <a:bodyPr wrap="square" anchor="t" lIns="0" rIns="0" tIns="0" bIns="0">
-            <a:spAutoFit/>
-          </a:bodyPr>
-          <a:lstStyle/>
-          <a:p>
-            <a:pPr algn="l">
-              <a:lnSpc>
-                <a:spcPct val="120000"/>
-              </a:lnSpc>
-              <a:spcBef>
-                <a:spcPts val="0"/>
-              </a:spcBef>
-              <a:spcAft>
-                <a:spcPts val="0"/>
-              </a:spcAft>
-            </a:pPr>
-            <a:r>
-              <a:rPr sz="950" b="0">
-                <a:solidFill>
-                  <a:srgbClr val="8A9099"/>
-                </a:solidFill>
-                <a:latin typeface="Red Hat Text"/>
-              </a:rPr>
-              <a:t>Split card. Left "RAG": a query flowing into a small doc-stack, one doc (POL-AUTO-01) highlighted and flowing into an answer that carries a "cited: POL-AUTO-01" badge; a small caution "retrieval fails → answer fails." Right "Grounding is engineered": two rows for the same claim — top row terse question → speech bubble "[get_claim(...)]" with a grey "ungrounded, toolCalls: []"; bottom row imperative question → a run tool icon → green "grounded: UnderReview."</a:t>
             </a:r>
           </a:p>
         </p:txBody>
@@ -8629,11 +8472,11 @@
         <p:spPr>
           <a:xfrm>
             <a:off x="841248" y="2395728"/>
-            <a:ext cx="5715000" cy="530352"/>
+            <a:ext cx="5138928" cy="786384"/>
           </a:xfrm>
           <a:prstGeom prst="roundRect">
             <a:avLst>
-              <a:gd name="adj" fmla="val 6000"/>
+              <a:gd name="adj" fmla="val 7000"/>
             </a:avLst>
           </a:prstGeom>
           <a:solidFill>
@@ -8668,9 +8511,55 @@
           </a:p>
         </p:txBody>
       </p:sp>
+      <p:sp>
+        <p:nvSpPr>
+          <p:cNvPr id="7" name="Rounded Rectangle 6"/>
+          <p:cNvSpPr/>
+          <p:nvPr/>
+        </p:nvSpPr>
+        <p:spPr>
+          <a:xfrm>
+            <a:off x="987552" y="2532888"/>
+            <a:ext cx="512064" cy="512064"/>
+          </a:xfrm>
+          <a:prstGeom prst="roundRect">
+            <a:avLst>
+              <a:gd name="adj" fmla="val 26000"/>
+            </a:avLst>
+          </a:prstGeom>
+          <a:solidFill>
+            <a:srgbClr val="EE0000"/>
+          </a:solidFill>
+          <a:ln>
+            <a:noFill/>
+          </a:ln>
+          <a:effectLst/>
+        </p:spPr>
+        <p:style>
+          <a:lnRef idx="1">
+            <a:schemeClr val="accent1"/>
+          </a:lnRef>
+          <a:fillRef idx="3">
+            <a:schemeClr val="accent1"/>
+          </a:fillRef>
+          <a:effectRef idx="2">
+            <a:schemeClr val="accent1"/>
+          </a:effectRef>
+          <a:fontRef idx="minor">
+            <a:schemeClr val="lt1"/>
+          </a:fontRef>
+        </p:style>
+        <p:txBody>
+          <a:bodyPr rtlCol="0" anchor="ctr"/>
+          <a:lstStyle/>
+          <a:p>
+            <a:pPr algn="ctr"/>
+          </a:p>
+        </p:txBody>
+      </p:sp>
       <p:pic>
         <p:nvPicPr>
-          <p:cNvPr id="7" name="Picture 6" descr="check_steel.png"/>
+          <p:cNvPr id="8" name="Picture 7" descr="check_white.png"/>
           <p:cNvPicPr>
             <a:picLocks noChangeAspect="1"/>
           </p:cNvPicPr>
@@ -8684,8 +8573,8 @@
         </p:blipFill>
         <p:spPr>
           <a:xfrm>
-            <a:off x="987552" y="2542032"/>
-            <a:ext cx="237744" cy="237744"/>
+            <a:off x="1110447" y="2655783"/>
+            <a:ext cx="266273" cy="266273"/>
           </a:xfrm>
           <a:prstGeom prst="rect">
             <a:avLst/>
@@ -8694,14 +8583,14 @@
       </p:pic>
       <p:sp>
         <p:nvSpPr>
-          <p:cNvPr id="8" name="TextBox 7"/>
+          <p:cNvPr id="9" name="TextBox 8"/>
           <p:cNvSpPr txBox="1"/>
           <p:nvPr/>
         </p:nvSpPr>
         <p:spPr>
           <a:xfrm>
-            <a:off x="1353312" y="2395728"/>
-            <a:ext cx="5029200" cy="530352"/>
+            <a:off x="1627632" y="2395728"/>
+            <a:ext cx="4206240" cy="786384"/>
           </a:xfrm>
           <a:prstGeom prst="rect">
             <a:avLst/>
@@ -8726,7 +8615,7 @@
               </a:spcAft>
             </a:pPr>
             <a:r>
-              <a:rPr sz="1200" b="0">
+              <a:rPr sz="1150" b="0">
                 <a:solidFill>
                   <a:srgbClr val="1A1A1A"/>
                 </a:solidFill>
@@ -8739,18 +8628,18 @@
       </p:sp>
       <p:sp>
         <p:nvSpPr>
-          <p:cNvPr id="9" name="Rounded Rectangle 8"/>
+          <p:cNvPr id="10" name="Rounded Rectangle 9"/>
           <p:cNvSpPr/>
           <p:nvPr/>
         </p:nvSpPr>
         <p:spPr>
           <a:xfrm>
-            <a:off x="841248" y="2999232"/>
-            <a:ext cx="5715000" cy="530352"/>
+            <a:off x="6254496" y="2395728"/>
+            <a:ext cx="5138928" cy="786384"/>
           </a:xfrm>
           <a:prstGeom prst="roundRect">
             <a:avLst>
-              <a:gd name="adj" fmla="val 6000"/>
+              <a:gd name="adj" fmla="val 7000"/>
             </a:avLst>
           </a:prstGeom>
           <a:solidFill>
@@ -8785,9 +8674,55 @@
           </a:p>
         </p:txBody>
       </p:sp>
+      <p:sp>
+        <p:nvSpPr>
+          <p:cNvPr id="11" name="Rounded Rectangle 10"/>
+          <p:cNvSpPr/>
+          <p:nvPr/>
+        </p:nvSpPr>
+        <p:spPr>
+          <a:xfrm>
+            <a:off x="6400800" y="2532888"/>
+            <a:ext cx="512064" cy="512064"/>
+          </a:xfrm>
+          <a:prstGeom prst="roundRect">
+            <a:avLst>
+              <a:gd name="adj" fmla="val 26000"/>
+            </a:avLst>
+          </a:prstGeom>
+          <a:solidFill>
+            <a:srgbClr val="EE0000"/>
+          </a:solidFill>
+          <a:ln>
+            <a:noFill/>
+          </a:ln>
+          <a:effectLst/>
+        </p:spPr>
+        <p:style>
+          <a:lnRef idx="1">
+            <a:schemeClr val="accent1"/>
+          </a:lnRef>
+          <a:fillRef idx="3">
+            <a:schemeClr val="accent1"/>
+          </a:fillRef>
+          <a:effectRef idx="2">
+            <a:schemeClr val="accent1"/>
+          </a:effectRef>
+          <a:fontRef idx="minor">
+            <a:schemeClr val="lt1"/>
+          </a:fontRef>
+        </p:style>
+        <p:txBody>
+          <a:bodyPr rtlCol="0" anchor="ctr"/>
+          <a:lstStyle/>
+          <a:p>
+            <a:pPr algn="ctr"/>
+          </a:p>
+        </p:txBody>
+      </p:sp>
       <p:pic>
         <p:nvPicPr>
-          <p:cNvPr id="10" name="Picture 9" descr="check_steel.png"/>
+          <p:cNvPr id="12" name="Picture 11" descr="check_white.png"/>
           <p:cNvPicPr>
             <a:picLocks noChangeAspect="1"/>
           </p:cNvPicPr>
@@ -8801,8 +8736,8 @@
         </p:blipFill>
         <p:spPr>
           <a:xfrm>
-            <a:off x="987552" y="3145536"/>
-            <a:ext cx="237744" cy="237744"/>
+            <a:off x="6523695" y="2655783"/>
+            <a:ext cx="266273" cy="266273"/>
           </a:xfrm>
           <a:prstGeom prst="rect">
             <a:avLst/>
@@ -8811,14 +8746,14 @@
       </p:pic>
       <p:sp>
         <p:nvSpPr>
-          <p:cNvPr id="11" name="TextBox 10"/>
+          <p:cNvPr id="13" name="TextBox 12"/>
           <p:cNvSpPr txBox="1"/>
           <p:nvPr/>
         </p:nvSpPr>
         <p:spPr>
           <a:xfrm>
-            <a:off x="1353312" y="2999232"/>
-            <a:ext cx="5029200" cy="530352"/>
+            <a:off x="7040880" y="2395728"/>
+            <a:ext cx="4206240" cy="786384"/>
           </a:xfrm>
           <a:prstGeom prst="rect">
             <a:avLst/>
@@ -8843,7 +8778,7 @@
               </a:spcAft>
             </a:pPr>
             <a:r>
-              <a:rPr sz="1200" b="0">
+              <a:rPr sz="1150" b="0">
                 <a:solidFill>
                   <a:srgbClr val="1A1A1A"/>
                 </a:solidFill>
@@ -8856,18 +8791,18 @@
       </p:sp>
       <p:sp>
         <p:nvSpPr>
-          <p:cNvPr id="12" name="Rounded Rectangle 11"/>
+          <p:cNvPr id="14" name="Rounded Rectangle 13"/>
           <p:cNvSpPr/>
           <p:nvPr/>
         </p:nvSpPr>
         <p:spPr>
           <a:xfrm>
-            <a:off x="841248" y="3602736"/>
-            <a:ext cx="5715000" cy="530352"/>
+            <a:off x="841248" y="3328416"/>
+            <a:ext cx="5138928" cy="786384"/>
           </a:xfrm>
           <a:prstGeom prst="roundRect">
             <a:avLst>
-              <a:gd name="adj" fmla="val 6000"/>
+              <a:gd name="adj" fmla="val 7000"/>
             </a:avLst>
           </a:prstGeom>
           <a:solidFill>
@@ -8902,9 +8837,55 @@
           </a:p>
         </p:txBody>
       </p:sp>
+      <p:sp>
+        <p:nvSpPr>
+          <p:cNvPr id="15" name="Rounded Rectangle 14"/>
+          <p:cNvSpPr/>
+          <p:nvPr/>
+        </p:nvSpPr>
+        <p:spPr>
+          <a:xfrm>
+            <a:off x="987552" y="3465576"/>
+            <a:ext cx="512064" cy="512064"/>
+          </a:xfrm>
+          <a:prstGeom prst="roundRect">
+            <a:avLst>
+              <a:gd name="adj" fmla="val 26000"/>
+            </a:avLst>
+          </a:prstGeom>
+          <a:solidFill>
+            <a:srgbClr val="EE0000"/>
+          </a:solidFill>
+          <a:ln>
+            <a:noFill/>
+          </a:ln>
+          <a:effectLst/>
+        </p:spPr>
+        <p:style>
+          <a:lnRef idx="1">
+            <a:schemeClr val="accent1"/>
+          </a:lnRef>
+          <a:fillRef idx="3">
+            <a:schemeClr val="accent1"/>
+          </a:fillRef>
+          <a:effectRef idx="2">
+            <a:schemeClr val="accent1"/>
+          </a:effectRef>
+          <a:fontRef idx="minor">
+            <a:schemeClr val="lt1"/>
+          </a:fontRef>
+        </p:style>
+        <p:txBody>
+          <a:bodyPr rtlCol="0" anchor="ctr"/>
+          <a:lstStyle/>
+          <a:p>
+            <a:pPr algn="ctr"/>
+          </a:p>
+        </p:txBody>
+      </p:sp>
       <p:pic>
         <p:nvPicPr>
-          <p:cNvPr id="13" name="Picture 12" descr="check_steel.png"/>
+          <p:cNvPr id="16" name="Picture 15" descr="check_white.png"/>
           <p:cNvPicPr>
             <a:picLocks noChangeAspect="1"/>
           </p:cNvPicPr>
@@ -8918,8 +8899,8 @@
         </p:blipFill>
         <p:spPr>
           <a:xfrm>
-            <a:off x="987552" y="3749040"/>
-            <a:ext cx="237744" cy="237744"/>
+            <a:off x="1110447" y="3588471"/>
+            <a:ext cx="266273" cy="266273"/>
           </a:xfrm>
           <a:prstGeom prst="rect">
             <a:avLst/>
@@ -8928,14 +8909,14 @@
       </p:pic>
       <p:sp>
         <p:nvSpPr>
-          <p:cNvPr id="14" name="TextBox 13"/>
+          <p:cNvPr id="17" name="TextBox 16"/>
           <p:cNvSpPr txBox="1"/>
           <p:nvPr/>
         </p:nvSpPr>
         <p:spPr>
           <a:xfrm>
-            <a:off x="1353312" y="3602736"/>
-            <a:ext cx="5029200" cy="530352"/>
+            <a:off x="1627632" y="3328416"/>
+            <a:ext cx="4206240" cy="786384"/>
           </a:xfrm>
           <a:prstGeom prst="rect">
             <a:avLst/>
@@ -8960,7 +8941,7 @@
               </a:spcAft>
             </a:pPr>
             <a:r>
-              <a:rPr sz="1200" b="0">
+              <a:rPr sz="1150" b="0">
                 <a:solidFill>
                   <a:srgbClr val="1A1A1A"/>
                 </a:solidFill>
@@ -8973,18 +8954,18 @@
       </p:sp>
       <p:sp>
         <p:nvSpPr>
-          <p:cNvPr id="15" name="Rounded Rectangle 14"/>
+          <p:cNvPr id="18" name="Rounded Rectangle 17"/>
           <p:cNvSpPr/>
           <p:nvPr/>
         </p:nvSpPr>
         <p:spPr>
           <a:xfrm>
-            <a:off x="841248" y="4206240"/>
-            <a:ext cx="5715000" cy="530352"/>
+            <a:off x="6254496" y="3328416"/>
+            <a:ext cx="5138928" cy="786384"/>
           </a:xfrm>
           <a:prstGeom prst="roundRect">
             <a:avLst>
-              <a:gd name="adj" fmla="val 6000"/>
+              <a:gd name="adj" fmla="val 7000"/>
             </a:avLst>
           </a:prstGeom>
           <a:solidFill>
@@ -9019,9 +9000,55 @@
           </a:p>
         </p:txBody>
       </p:sp>
+      <p:sp>
+        <p:nvSpPr>
+          <p:cNvPr id="19" name="Rounded Rectangle 18"/>
+          <p:cNvSpPr/>
+          <p:nvPr/>
+        </p:nvSpPr>
+        <p:spPr>
+          <a:xfrm>
+            <a:off x="6400800" y="3465576"/>
+            <a:ext cx="512064" cy="512064"/>
+          </a:xfrm>
+          <a:prstGeom prst="roundRect">
+            <a:avLst>
+              <a:gd name="adj" fmla="val 26000"/>
+            </a:avLst>
+          </a:prstGeom>
+          <a:solidFill>
+            <a:srgbClr val="EE0000"/>
+          </a:solidFill>
+          <a:ln>
+            <a:noFill/>
+          </a:ln>
+          <a:effectLst/>
+        </p:spPr>
+        <p:style>
+          <a:lnRef idx="1">
+            <a:schemeClr val="accent1"/>
+          </a:lnRef>
+          <a:fillRef idx="3">
+            <a:schemeClr val="accent1"/>
+          </a:fillRef>
+          <a:effectRef idx="2">
+            <a:schemeClr val="accent1"/>
+          </a:effectRef>
+          <a:fontRef idx="minor">
+            <a:schemeClr val="lt1"/>
+          </a:fontRef>
+        </p:style>
+        <p:txBody>
+          <a:bodyPr rtlCol="0" anchor="ctr"/>
+          <a:lstStyle/>
+          <a:p>
+            <a:pPr algn="ctr"/>
+          </a:p>
+        </p:txBody>
+      </p:sp>
       <p:pic>
         <p:nvPicPr>
-          <p:cNvPr id="16" name="Picture 15" descr="check_steel.png"/>
+          <p:cNvPr id="20" name="Picture 19" descr="check_white.png"/>
           <p:cNvPicPr>
             <a:picLocks noChangeAspect="1"/>
           </p:cNvPicPr>
@@ -9035,8 +9062,8 @@
         </p:blipFill>
         <p:spPr>
           <a:xfrm>
-            <a:off x="987552" y="4352544"/>
-            <a:ext cx="237744" cy="237744"/>
+            <a:off x="6523695" y="3588471"/>
+            <a:ext cx="266273" cy="266273"/>
           </a:xfrm>
           <a:prstGeom prst="rect">
             <a:avLst/>
@@ -9045,14 +9072,14 @@
       </p:pic>
       <p:sp>
         <p:nvSpPr>
-          <p:cNvPr id="17" name="TextBox 16"/>
+          <p:cNvPr id="21" name="TextBox 20"/>
           <p:cNvSpPr txBox="1"/>
           <p:nvPr/>
         </p:nvSpPr>
         <p:spPr>
           <a:xfrm>
-            <a:off x="1353312" y="4206240"/>
-            <a:ext cx="5029200" cy="530352"/>
+            <a:off x="7040880" y="3328416"/>
+            <a:ext cx="4206240" cy="786384"/>
           </a:xfrm>
           <a:prstGeom prst="rect">
             <a:avLst/>
@@ -9077,7 +9104,7 @@
               </a:spcAft>
             </a:pPr>
             <a:r>
-              <a:rPr sz="1200" b="0">
+              <a:rPr sz="1150" b="0">
                 <a:solidFill>
                   <a:srgbClr val="1A1A1A"/>
                 </a:solidFill>
@@ -9090,18 +9117,18 @@
       </p:sp>
       <p:sp>
         <p:nvSpPr>
-          <p:cNvPr id="18" name="Rounded Rectangle 17"/>
+          <p:cNvPr id="22" name="Rounded Rectangle 21"/>
           <p:cNvSpPr/>
           <p:nvPr/>
         </p:nvSpPr>
         <p:spPr>
           <a:xfrm>
-            <a:off x="841248" y="4809744"/>
-            <a:ext cx="5715000" cy="530352"/>
+            <a:off x="841248" y="4261104"/>
+            <a:ext cx="5138928" cy="786384"/>
           </a:xfrm>
           <a:prstGeom prst="roundRect">
             <a:avLst>
-              <a:gd name="adj" fmla="val 6000"/>
+              <a:gd name="adj" fmla="val 7000"/>
             </a:avLst>
           </a:prstGeom>
           <a:solidFill>
@@ -9136,9 +9163,55 @@
           </a:p>
         </p:txBody>
       </p:sp>
+      <p:sp>
+        <p:nvSpPr>
+          <p:cNvPr id="23" name="Rounded Rectangle 22"/>
+          <p:cNvSpPr/>
+          <p:nvPr/>
+        </p:nvSpPr>
+        <p:spPr>
+          <a:xfrm>
+            <a:off x="987552" y="4398264"/>
+            <a:ext cx="512064" cy="512064"/>
+          </a:xfrm>
+          <a:prstGeom prst="roundRect">
+            <a:avLst>
+              <a:gd name="adj" fmla="val 26000"/>
+            </a:avLst>
+          </a:prstGeom>
+          <a:solidFill>
+            <a:srgbClr val="EE0000"/>
+          </a:solidFill>
+          <a:ln>
+            <a:noFill/>
+          </a:ln>
+          <a:effectLst/>
+        </p:spPr>
+        <p:style>
+          <a:lnRef idx="1">
+            <a:schemeClr val="accent1"/>
+          </a:lnRef>
+          <a:fillRef idx="3">
+            <a:schemeClr val="accent1"/>
+          </a:fillRef>
+          <a:effectRef idx="2">
+            <a:schemeClr val="accent1"/>
+          </a:effectRef>
+          <a:fontRef idx="minor">
+            <a:schemeClr val="lt1"/>
+          </a:fontRef>
+        </p:style>
+        <p:txBody>
+          <a:bodyPr rtlCol="0" anchor="ctr"/>
+          <a:lstStyle/>
+          <a:p>
+            <a:pPr algn="ctr"/>
+          </a:p>
+        </p:txBody>
+      </p:sp>
       <p:pic>
         <p:nvPicPr>
-          <p:cNvPr id="19" name="Picture 18" descr="check_steel.png"/>
+          <p:cNvPr id="24" name="Picture 23" descr="check_white.png"/>
           <p:cNvPicPr>
             <a:picLocks noChangeAspect="1"/>
           </p:cNvPicPr>
@@ -9152,8 +9225,8 @@
         </p:blipFill>
         <p:spPr>
           <a:xfrm>
-            <a:off x="987552" y="4956048"/>
-            <a:ext cx="237744" cy="237744"/>
+            <a:off x="1110447" y="4521159"/>
+            <a:ext cx="266273" cy="266273"/>
           </a:xfrm>
           <a:prstGeom prst="rect">
             <a:avLst/>
@@ -9162,14 +9235,14 @@
       </p:pic>
       <p:sp>
         <p:nvSpPr>
-          <p:cNvPr id="20" name="TextBox 19"/>
+          <p:cNvPr id="25" name="TextBox 24"/>
           <p:cNvSpPr txBox="1"/>
           <p:nvPr/>
         </p:nvSpPr>
         <p:spPr>
           <a:xfrm>
-            <a:off x="1353312" y="4809744"/>
-            <a:ext cx="5029200" cy="530352"/>
+            <a:off x="1627632" y="4261104"/>
+            <a:ext cx="4206240" cy="786384"/>
           </a:xfrm>
           <a:prstGeom prst="rect">
             <a:avLst/>
@@ -9194,221 +9267,13 @@
               </a:spcAft>
             </a:pPr>
             <a:r>
-              <a:rPr sz="1200" b="0">
+              <a:rPr sz="1150" b="0">
                 <a:solidFill>
                   <a:srgbClr val="1A1A1A"/>
                 </a:solidFill>
                 <a:latin typeface="Red Hat Text"/>
               </a:rPr>
               <a:t>Each slots in behind an interface the agent ALREADY uses — adopt when the need is real</a:t>
-            </a:r>
-          </a:p>
-        </p:txBody>
-      </p:sp>
-      <p:sp>
-        <p:nvSpPr>
-          <p:cNvPr id="21" name="Rounded Rectangle 20"/>
-          <p:cNvSpPr/>
-          <p:nvPr/>
-        </p:nvSpPr>
-        <p:spPr>
-          <a:xfrm>
-            <a:off x="6812280" y="2395728"/>
-            <a:ext cx="4538167" cy="2944368"/>
-          </a:xfrm>
-          <a:prstGeom prst="roundRect">
-            <a:avLst>
-              <a:gd name="adj" fmla="val 4000"/>
-            </a:avLst>
-          </a:prstGeom>
-          <a:solidFill>
-            <a:srgbClr val="FFFFFF"/>
-          </a:solidFill>
-          <a:ln w="15240">
-            <a:solidFill>
-              <a:srgbClr val="DDE1E6"/>
-            </a:solidFill>
-          </a:ln>
-          <a:effectLst/>
-        </p:spPr>
-        <p:style>
-          <a:lnRef idx="1">
-            <a:schemeClr val="accent1"/>
-          </a:lnRef>
-          <a:fillRef idx="3">
-            <a:schemeClr val="accent1"/>
-          </a:fillRef>
-          <a:effectRef idx="2">
-            <a:schemeClr val="accent1"/>
-          </a:effectRef>
-          <a:fontRef idx="minor">
-            <a:schemeClr val="lt1"/>
-          </a:fontRef>
-        </p:style>
-        <p:txBody>
-          <a:bodyPr rtlCol="0" anchor="ctr"/>
-          <a:lstStyle/>
-          <a:p>
-            <a:pPr algn="ctr"/>
-          </a:p>
-        </p:txBody>
-      </p:sp>
-      <p:sp>
-        <p:nvSpPr>
-          <p:cNvPr id="22" name="Rounded Rectangle 21"/>
-          <p:cNvSpPr/>
-          <p:nvPr/>
-        </p:nvSpPr>
-        <p:spPr>
-          <a:xfrm>
-            <a:off x="7013448" y="2596896"/>
-            <a:ext cx="1298448" cy="310896"/>
-          </a:xfrm>
-          <a:prstGeom prst="roundRect">
-            <a:avLst>
-              <a:gd name="adj" fmla="val 50000"/>
-            </a:avLst>
-          </a:prstGeom>
-          <a:solidFill>
-            <a:srgbClr val="FCECEC"/>
-          </a:solidFill>
-          <a:ln>
-            <a:noFill/>
-          </a:ln>
-          <a:effectLst/>
-        </p:spPr>
-        <p:style>
-          <a:lnRef idx="1">
-            <a:schemeClr val="accent1"/>
-          </a:lnRef>
-          <a:fillRef idx="3">
-            <a:schemeClr val="accent1"/>
-          </a:fillRef>
-          <a:effectRef idx="2">
-            <a:schemeClr val="accent1"/>
-          </a:effectRef>
-          <a:fontRef idx="minor">
-            <a:schemeClr val="lt1"/>
-          </a:fontRef>
-        </p:style>
-        <p:txBody>
-          <a:bodyPr rtlCol="0" anchor="ctr"/>
-          <a:lstStyle/>
-          <a:p>
-            <a:pPr algn="ctr"/>
-          </a:p>
-        </p:txBody>
-      </p:sp>
-      <p:sp>
-        <p:nvSpPr>
-          <p:cNvPr id="23" name="TextBox 22"/>
-          <p:cNvSpPr txBox="1"/>
-          <p:nvPr/>
-        </p:nvSpPr>
-        <p:spPr>
-          <a:xfrm>
-            <a:off x="7013448" y="2596896"/>
-            <a:ext cx="1298448" cy="310896"/>
-          </a:xfrm>
-          <a:prstGeom prst="rect">
-            <a:avLst/>
-          </a:prstGeom>
-          <a:noFill/>
-        </p:spPr>
-        <p:txBody>
-          <a:bodyPr wrap="none" anchor="ctr" lIns="0" rIns="0" tIns="0" bIns="0">
-            <a:spAutoFit/>
-          </a:bodyPr>
-          <a:lstStyle/>
-          <a:p>
-            <a:pPr algn="ctr">
-              <a:lnSpc>
-                <a:spcPct val="106000"/>
-              </a:lnSpc>
-              <a:spcBef>
-                <a:spcPts val="0"/>
-              </a:spcBef>
-              <a:spcAft>
-                <a:spcPts val="0"/>
-              </a:spcAft>
-            </a:pPr>
-            <a:r>
-              <a:rPr sz="850" b="1">
-                <a:solidFill>
-                  <a:srgbClr val="B80000"/>
-                </a:solidFill>
-                <a:latin typeface="Red Hat Display"/>
-              </a:rPr>
-              <a:t>MEDIA PASS</a:t>
-            </a:r>
-          </a:p>
-        </p:txBody>
-      </p:sp>
-      <p:pic>
-        <p:nvPicPr>
-          <p:cNvPr id="24" name="Picture 23" descr="eye_slate.png"/>
-          <p:cNvPicPr>
-            <a:picLocks noChangeAspect="1"/>
-          </p:cNvPicPr>
-          <p:nvPr/>
-        </p:nvPicPr>
-        <p:blipFill>
-          <a:blip r:embed="rId4"/>
-          <a:stretch>
-            <a:fillRect/>
-          </a:stretch>
-        </p:blipFill>
-        <p:spPr>
-          <a:xfrm>
-            <a:off x="8843619" y="3108960"/>
-            <a:ext cx="475488" cy="475488"/>
-          </a:xfrm>
-          <a:prstGeom prst="rect">
-            <a:avLst/>
-          </a:prstGeom>
-        </p:spPr>
-      </p:pic>
-      <p:sp>
-        <p:nvSpPr>
-          <p:cNvPr id="25" name="TextBox 24"/>
-          <p:cNvSpPr txBox="1"/>
-          <p:nvPr/>
-        </p:nvSpPr>
-        <p:spPr>
-          <a:xfrm>
-            <a:off x="7050024" y="3721608"/>
-            <a:ext cx="4062679" cy="1481328"/>
-          </a:xfrm>
-          <a:prstGeom prst="rect">
-            <a:avLst/>
-          </a:prstGeom>
-          <a:noFill/>
-        </p:spPr>
-        <p:txBody>
-          <a:bodyPr wrap="square" anchor="t" lIns="0" rIns="0" tIns="0" bIns="0">
-            <a:spAutoFit/>
-          </a:bodyPr>
-          <a:lstStyle/>
-          <a:p>
-            <a:pPr algn="l">
-              <a:lnSpc>
-                <a:spcPct val="120000"/>
-              </a:lnSpc>
-              <a:spcBef>
-                <a:spcPts val="0"/>
-              </a:spcBef>
-              <a:spcAft>
-                <a:spcPts val="0"/>
-              </a:spcAft>
-            </a:pPr>
-            <a:r>
-              <a:rPr sz="950" b="0">
-                <a:solidFill>
-                  <a:srgbClr val="8A9099"/>
-                </a:solidFill>
-                <a:latin typeface="Red Hat Text"/>
-              </a:rPr>
-              <a:t>A layered stack diagram (bottom to top): "Model serving (MaaS today · in-cluster serving [ADD-ON])", "Agent runtime (Quarkus LangChain4j today · Llama Stack [ADD-ON])", "Retrieval (keyword today · vector DB [ADD-ON])", "Guardrails [ADD-ON]", "Observability (metrics + tokens today · traces→Tempo [ADD-ON])". The "today" half of each layer is solid; the [ADD-ON] half is a dashed outline labelled "adopt when the need is real."</a:t>
             </a:r>
           </a:p>
         </p:txBody>
@@ -9716,11 +9581,11 @@
         <p:spPr>
           <a:xfrm>
             <a:off x="841248" y="2395728"/>
-            <a:ext cx="5715000" cy="530352"/>
+            <a:ext cx="5138928" cy="786384"/>
           </a:xfrm>
           <a:prstGeom prst="roundRect">
             <a:avLst>
-              <a:gd name="adj" fmla="val 6000"/>
+              <a:gd name="adj" fmla="val 7000"/>
             </a:avLst>
           </a:prstGeom>
           <a:solidFill>
@@ -9755,9 +9620,55 @@
           </a:p>
         </p:txBody>
       </p:sp>
+      <p:sp>
+        <p:nvSpPr>
+          <p:cNvPr id="7" name="Rounded Rectangle 6"/>
+          <p:cNvSpPr/>
+          <p:nvPr/>
+        </p:nvSpPr>
+        <p:spPr>
+          <a:xfrm>
+            <a:off x="987552" y="2532888"/>
+            <a:ext cx="512064" cy="512064"/>
+          </a:xfrm>
+          <a:prstGeom prst="roundRect">
+            <a:avLst>
+              <a:gd name="adj" fmla="val 26000"/>
+            </a:avLst>
+          </a:prstGeom>
+          <a:solidFill>
+            <a:srgbClr val="EE0000"/>
+          </a:solidFill>
+          <a:ln>
+            <a:noFill/>
+          </a:ln>
+          <a:effectLst/>
+        </p:spPr>
+        <p:style>
+          <a:lnRef idx="1">
+            <a:schemeClr val="accent1"/>
+          </a:lnRef>
+          <a:fillRef idx="3">
+            <a:schemeClr val="accent1"/>
+          </a:fillRef>
+          <a:effectRef idx="2">
+            <a:schemeClr val="accent1"/>
+          </a:effectRef>
+          <a:fontRef idx="minor">
+            <a:schemeClr val="lt1"/>
+          </a:fontRef>
+        </p:style>
+        <p:txBody>
+          <a:bodyPr rtlCol="0" anchor="ctr"/>
+          <a:lstStyle/>
+          <a:p>
+            <a:pPr algn="ctr"/>
+          </a:p>
+        </p:txBody>
+      </p:sp>
       <p:pic>
         <p:nvPicPr>
-          <p:cNvPr id="7" name="Picture 6" descr="check_steel.png"/>
+          <p:cNvPr id="8" name="Picture 7" descr="check_white.png"/>
           <p:cNvPicPr>
             <a:picLocks noChangeAspect="1"/>
           </p:cNvPicPr>
@@ -9771,8 +9682,8 @@
         </p:blipFill>
         <p:spPr>
           <a:xfrm>
-            <a:off x="987552" y="2542032"/>
-            <a:ext cx="237744" cy="237744"/>
+            <a:off x="1110447" y="2655783"/>
+            <a:ext cx="266273" cy="266273"/>
           </a:xfrm>
           <a:prstGeom prst="rect">
             <a:avLst/>
@@ -9781,14 +9692,14 @@
       </p:pic>
       <p:sp>
         <p:nvSpPr>
-          <p:cNvPr id="8" name="TextBox 7"/>
+          <p:cNvPr id="9" name="TextBox 8"/>
           <p:cNvSpPr txBox="1"/>
           <p:nvPr/>
         </p:nvSpPr>
         <p:spPr>
           <a:xfrm>
-            <a:off x="1353312" y="2395728"/>
-            <a:ext cx="5029200" cy="530352"/>
+            <a:off x="1627632" y="2395728"/>
+            <a:ext cx="4206240" cy="786384"/>
           </a:xfrm>
           <a:prstGeom prst="rect">
             <a:avLst/>
@@ -9813,7 +9724,7 @@
               </a:spcAft>
             </a:pPr>
             <a:r>
-              <a:rPr sz="1200" b="0">
+              <a:rPr sz="1150" b="0">
                 <a:solidFill>
                   <a:srgbClr val="1A1A1A"/>
                 </a:solidFill>
@@ -9826,18 +9737,18 @@
       </p:sp>
       <p:sp>
         <p:nvSpPr>
-          <p:cNvPr id="9" name="Rounded Rectangle 8"/>
+          <p:cNvPr id="10" name="Rounded Rectangle 9"/>
           <p:cNvSpPr/>
           <p:nvPr/>
         </p:nvSpPr>
         <p:spPr>
           <a:xfrm>
-            <a:off x="841248" y="2999232"/>
-            <a:ext cx="5715000" cy="530352"/>
+            <a:off x="6254496" y="2395728"/>
+            <a:ext cx="5138928" cy="786384"/>
           </a:xfrm>
           <a:prstGeom prst="roundRect">
             <a:avLst>
-              <a:gd name="adj" fmla="val 6000"/>
+              <a:gd name="adj" fmla="val 7000"/>
             </a:avLst>
           </a:prstGeom>
           <a:solidFill>
@@ -9872,9 +9783,55 @@
           </a:p>
         </p:txBody>
       </p:sp>
+      <p:sp>
+        <p:nvSpPr>
+          <p:cNvPr id="11" name="Rounded Rectangle 10"/>
+          <p:cNvSpPr/>
+          <p:nvPr/>
+        </p:nvSpPr>
+        <p:spPr>
+          <a:xfrm>
+            <a:off x="6400800" y="2532888"/>
+            <a:ext cx="512064" cy="512064"/>
+          </a:xfrm>
+          <a:prstGeom prst="roundRect">
+            <a:avLst>
+              <a:gd name="adj" fmla="val 26000"/>
+            </a:avLst>
+          </a:prstGeom>
+          <a:solidFill>
+            <a:srgbClr val="EE0000"/>
+          </a:solidFill>
+          <a:ln>
+            <a:noFill/>
+          </a:ln>
+          <a:effectLst/>
+        </p:spPr>
+        <p:style>
+          <a:lnRef idx="1">
+            <a:schemeClr val="accent1"/>
+          </a:lnRef>
+          <a:fillRef idx="3">
+            <a:schemeClr val="accent1"/>
+          </a:fillRef>
+          <a:effectRef idx="2">
+            <a:schemeClr val="accent1"/>
+          </a:effectRef>
+          <a:fontRef idx="minor">
+            <a:schemeClr val="lt1"/>
+          </a:fontRef>
+        </p:style>
+        <p:txBody>
+          <a:bodyPr rtlCol="0" anchor="ctr"/>
+          <a:lstStyle/>
+          <a:p>
+            <a:pPr algn="ctr"/>
+          </a:p>
+        </p:txBody>
+      </p:sp>
       <p:pic>
         <p:nvPicPr>
-          <p:cNvPr id="10" name="Picture 9" descr="check_steel.png"/>
+          <p:cNvPr id="12" name="Picture 11" descr="check_white.png"/>
           <p:cNvPicPr>
             <a:picLocks noChangeAspect="1"/>
           </p:cNvPicPr>
@@ -9888,8 +9845,8 @@
         </p:blipFill>
         <p:spPr>
           <a:xfrm>
-            <a:off x="987552" y="3145536"/>
-            <a:ext cx="237744" cy="237744"/>
+            <a:off x="6523695" y="2655783"/>
+            <a:ext cx="266273" cy="266273"/>
           </a:xfrm>
           <a:prstGeom prst="rect">
             <a:avLst/>
@@ -9898,14 +9855,14 @@
       </p:pic>
       <p:sp>
         <p:nvSpPr>
-          <p:cNvPr id="11" name="TextBox 10"/>
+          <p:cNvPr id="13" name="TextBox 12"/>
           <p:cNvSpPr txBox="1"/>
           <p:nvPr/>
         </p:nvSpPr>
         <p:spPr>
           <a:xfrm>
-            <a:off x="1353312" y="2999232"/>
-            <a:ext cx="5029200" cy="530352"/>
+            <a:off x="7040880" y="2395728"/>
+            <a:ext cx="4206240" cy="786384"/>
           </a:xfrm>
           <a:prstGeom prst="rect">
             <a:avLst/>
@@ -9930,7 +9887,7 @@
               </a:spcAft>
             </a:pPr>
             <a:r>
-              <a:rPr sz="1200" b="0">
+              <a:rPr sz="1150" b="0">
                 <a:solidFill>
                   <a:srgbClr val="1A1A1A"/>
                 </a:solidFill>
@@ -9943,18 +9900,18 @@
       </p:sp>
       <p:sp>
         <p:nvSpPr>
-          <p:cNvPr id="12" name="Rounded Rectangle 11"/>
+          <p:cNvPr id="14" name="Rounded Rectangle 13"/>
           <p:cNvSpPr/>
           <p:nvPr/>
         </p:nvSpPr>
         <p:spPr>
           <a:xfrm>
-            <a:off x="841248" y="3602736"/>
-            <a:ext cx="5715000" cy="530352"/>
+            <a:off x="841248" y="3328416"/>
+            <a:ext cx="5138928" cy="786384"/>
           </a:xfrm>
           <a:prstGeom prst="roundRect">
             <a:avLst>
-              <a:gd name="adj" fmla="val 6000"/>
+              <a:gd name="adj" fmla="val 7000"/>
             </a:avLst>
           </a:prstGeom>
           <a:solidFill>
@@ -9989,9 +9946,55 @@
           </a:p>
         </p:txBody>
       </p:sp>
+      <p:sp>
+        <p:nvSpPr>
+          <p:cNvPr id="15" name="Rounded Rectangle 14"/>
+          <p:cNvSpPr/>
+          <p:nvPr/>
+        </p:nvSpPr>
+        <p:spPr>
+          <a:xfrm>
+            <a:off x="987552" y="3465576"/>
+            <a:ext cx="512064" cy="512064"/>
+          </a:xfrm>
+          <a:prstGeom prst="roundRect">
+            <a:avLst>
+              <a:gd name="adj" fmla="val 26000"/>
+            </a:avLst>
+          </a:prstGeom>
+          <a:solidFill>
+            <a:srgbClr val="EE0000"/>
+          </a:solidFill>
+          <a:ln>
+            <a:noFill/>
+          </a:ln>
+          <a:effectLst/>
+        </p:spPr>
+        <p:style>
+          <a:lnRef idx="1">
+            <a:schemeClr val="accent1"/>
+          </a:lnRef>
+          <a:fillRef idx="3">
+            <a:schemeClr val="accent1"/>
+          </a:fillRef>
+          <a:effectRef idx="2">
+            <a:schemeClr val="accent1"/>
+          </a:effectRef>
+          <a:fontRef idx="minor">
+            <a:schemeClr val="lt1"/>
+          </a:fontRef>
+        </p:style>
+        <p:txBody>
+          <a:bodyPr rtlCol="0" anchor="ctr"/>
+          <a:lstStyle/>
+          <a:p>
+            <a:pPr algn="ctr"/>
+          </a:p>
+        </p:txBody>
+      </p:sp>
       <p:pic>
         <p:nvPicPr>
-          <p:cNvPr id="13" name="Picture 12" descr="check_steel.png"/>
+          <p:cNvPr id="16" name="Picture 15" descr="check_white.png"/>
           <p:cNvPicPr>
             <a:picLocks noChangeAspect="1"/>
           </p:cNvPicPr>
@@ -10005,8 +10008,8 @@
         </p:blipFill>
         <p:spPr>
           <a:xfrm>
-            <a:off x="987552" y="3749040"/>
-            <a:ext cx="237744" cy="237744"/>
+            <a:off x="1110447" y="3588471"/>
+            <a:ext cx="266273" cy="266273"/>
           </a:xfrm>
           <a:prstGeom prst="rect">
             <a:avLst/>
@@ -10015,14 +10018,14 @@
       </p:pic>
       <p:sp>
         <p:nvSpPr>
-          <p:cNvPr id="14" name="TextBox 13"/>
+          <p:cNvPr id="17" name="TextBox 16"/>
           <p:cNvSpPr txBox="1"/>
           <p:nvPr/>
         </p:nvSpPr>
         <p:spPr>
           <a:xfrm>
-            <a:off x="1353312" y="3602736"/>
-            <a:ext cx="5029200" cy="530352"/>
+            <a:off x="1627632" y="3328416"/>
+            <a:ext cx="4206240" cy="786384"/>
           </a:xfrm>
           <a:prstGeom prst="rect">
             <a:avLst/>
@@ -10047,7 +10050,7 @@
               </a:spcAft>
             </a:pPr>
             <a:r>
-              <a:rPr sz="1200" b="0">
+              <a:rPr sz="1150" b="0">
                 <a:solidFill>
                   <a:srgbClr val="1A1A1A"/>
                 </a:solidFill>
@@ -10060,18 +10063,18 @@
       </p:sp>
       <p:sp>
         <p:nvSpPr>
-          <p:cNvPr id="15" name="Rounded Rectangle 14"/>
+          <p:cNvPr id="18" name="Rounded Rectangle 17"/>
           <p:cNvSpPr/>
           <p:nvPr/>
         </p:nvSpPr>
         <p:spPr>
           <a:xfrm>
-            <a:off x="841248" y="4206240"/>
-            <a:ext cx="5715000" cy="530352"/>
+            <a:off x="6254496" y="3328416"/>
+            <a:ext cx="5138928" cy="786384"/>
           </a:xfrm>
           <a:prstGeom prst="roundRect">
             <a:avLst>
-              <a:gd name="adj" fmla="val 6000"/>
+              <a:gd name="adj" fmla="val 7000"/>
             </a:avLst>
           </a:prstGeom>
           <a:solidFill>
@@ -10106,9 +10109,55 @@
           </a:p>
         </p:txBody>
       </p:sp>
+      <p:sp>
+        <p:nvSpPr>
+          <p:cNvPr id="19" name="Rounded Rectangle 18"/>
+          <p:cNvSpPr/>
+          <p:nvPr/>
+        </p:nvSpPr>
+        <p:spPr>
+          <a:xfrm>
+            <a:off x="6400800" y="3465576"/>
+            <a:ext cx="512064" cy="512064"/>
+          </a:xfrm>
+          <a:prstGeom prst="roundRect">
+            <a:avLst>
+              <a:gd name="adj" fmla="val 26000"/>
+            </a:avLst>
+          </a:prstGeom>
+          <a:solidFill>
+            <a:srgbClr val="EE0000"/>
+          </a:solidFill>
+          <a:ln>
+            <a:noFill/>
+          </a:ln>
+          <a:effectLst/>
+        </p:spPr>
+        <p:style>
+          <a:lnRef idx="1">
+            <a:schemeClr val="accent1"/>
+          </a:lnRef>
+          <a:fillRef idx="3">
+            <a:schemeClr val="accent1"/>
+          </a:fillRef>
+          <a:effectRef idx="2">
+            <a:schemeClr val="accent1"/>
+          </a:effectRef>
+          <a:fontRef idx="minor">
+            <a:schemeClr val="lt1"/>
+          </a:fontRef>
+        </p:style>
+        <p:txBody>
+          <a:bodyPr rtlCol="0" anchor="ctr"/>
+          <a:lstStyle/>
+          <a:p>
+            <a:pPr algn="ctr"/>
+          </a:p>
+        </p:txBody>
+      </p:sp>
       <p:pic>
         <p:nvPicPr>
-          <p:cNvPr id="16" name="Picture 15" descr="check_steel.png"/>
+          <p:cNvPr id="20" name="Picture 19" descr="check_white.png"/>
           <p:cNvPicPr>
             <a:picLocks noChangeAspect="1"/>
           </p:cNvPicPr>
@@ -10122,8 +10171,8 @@
         </p:blipFill>
         <p:spPr>
           <a:xfrm>
-            <a:off x="987552" y="4352544"/>
-            <a:ext cx="237744" cy="237744"/>
+            <a:off x="6523695" y="3588471"/>
+            <a:ext cx="266273" cy="266273"/>
           </a:xfrm>
           <a:prstGeom prst="rect">
             <a:avLst/>
@@ -10132,14 +10181,14 @@
       </p:pic>
       <p:sp>
         <p:nvSpPr>
-          <p:cNvPr id="17" name="TextBox 16"/>
+          <p:cNvPr id="21" name="TextBox 20"/>
           <p:cNvSpPr txBox="1"/>
           <p:nvPr/>
         </p:nvSpPr>
         <p:spPr>
           <a:xfrm>
-            <a:off x="1353312" y="4206240"/>
-            <a:ext cx="5029200" cy="530352"/>
+            <a:off x="7040880" y="3328416"/>
+            <a:ext cx="4206240" cy="786384"/>
           </a:xfrm>
           <a:prstGeom prst="rect">
             <a:avLst/>
@@ -10164,7 +10213,7 @@
               </a:spcAft>
             </a:pPr>
             <a:r>
-              <a:rPr sz="1200" b="0">
+              <a:rPr sz="1150" b="0">
                 <a:solidFill>
                   <a:srgbClr val="1A1A1A"/>
                 </a:solidFill>
@@ -10177,18 +10226,18 @@
       </p:sp>
       <p:sp>
         <p:nvSpPr>
-          <p:cNvPr id="18" name="Rounded Rectangle 17"/>
+          <p:cNvPr id="22" name="Rounded Rectangle 21"/>
           <p:cNvSpPr/>
           <p:nvPr/>
         </p:nvSpPr>
         <p:spPr>
           <a:xfrm>
-            <a:off x="841248" y="4809744"/>
-            <a:ext cx="5715000" cy="530352"/>
+            <a:off x="841248" y="4261104"/>
+            <a:ext cx="5138928" cy="786384"/>
           </a:xfrm>
           <a:prstGeom prst="roundRect">
             <a:avLst>
-              <a:gd name="adj" fmla="val 6000"/>
+              <a:gd name="adj" fmla="val 7000"/>
             </a:avLst>
           </a:prstGeom>
           <a:solidFill>
@@ -10223,9 +10272,55 @@
           </a:p>
         </p:txBody>
       </p:sp>
+      <p:sp>
+        <p:nvSpPr>
+          <p:cNvPr id="23" name="Rounded Rectangle 22"/>
+          <p:cNvSpPr/>
+          <p:nvPr/>
+        </p:nvSpPr>
+        <p:spPr>
+          <a:xfrm>
+            <a:off x="987552" y="4398264"/>
+            <a:ext cx="512064" cy="512064"/>
+          </a:xfrm>
+          <a:prstGeom prst="roundRect">
+            <a:avLst>
+              <a:gd name="adj" fmla="val 26000"/>
+            </a:avLst>
+          </a:prstGeom>
+          <a:solidFill>
+            <a:srgbClr val="EE0000"/>
+          </a:solidFill>
+          <a:ln>
+            <a:noFill/>
+          </a:ln>
+          <a:effectLst/>
+        </p:spPr>
+        <p:style>
+          <a:lnRef idx="1">
+            <a:schemeClr val="accent1"/>
+          </a:lnRef>
+          <a:fillRef idx="3">
+            <a:schemeClr val="accent1"/>
+          </a:fillRef>
+          <a:effectRef idx="2">
+            <a:schemeClr val="accent1"/>
+          </a:effectRef>
+          <a:fontRef idx="minor">
+            <a:schemeClr val="lt1"/>
+          </a:fontRef>
+        </p:style>
+        <p:txBody>
+          <a:bodyPr rtlCol="0" anchor="ctr"/>
+          <a:lstStyle/>
+          <a:p>
+            <a:pPr algn="ctr"/>
+          </a:p>
+        </p:txBody>
+      </p:sp>
       <p:pic>
         <p:nvPicPr>
-          <p:cNvPr id="19" name="Picture 18" descr="check_steel.png"/>
+          <p:cNvPr id="24" name="Picture 23" descr="check_white.png"/>
           <p:cNvPicPr>
             <a:picLocks noChangeAspect="1"/>
           </p:cNvPicPr>
@@ -10239,8 +10334,8 @@
         </p:blipFill>
         <p:spPr>
           <a:xfrm>
-            <a:off x="987552" y="4956048"/>
-            <a:ext cx="237744" cy="237744"/>
+            <a:off x="1110447" y="4521159"/>
+            <a:ext cx="266273" cy="266273"/>
           </a:xfrm>
           <a:prstGeom prst="rect">
             <a:avLst/>
@@ -10249,14 +10344,14 @@
       </p:pic>
       <p:sp>
         <p:nvSpPr>
-          <p:cNvPr id="20" name="TextBox 19"/>
+          <p:cNvPr id="25" name="TextBox 24"/>
           <p:cNvSpPr txBox="1"/>
           <p:nvPr/>
         </p:nvSpPr>
         <p:spPr>
           <a:xfrm>
-            <a:off x="1353312" y="4809744"/>
-            <a:ext cx="5029200" cy="530352"/>
+            <a:off x="1627632" y="4261104"/>
+            <a:ext cx="4206240" cy="786384"/>
           </a:xfrm>
           <a:prstGeom prst="rect">
             <a:avLst/>
@@ -10281,7 +10376,7 @@
               </a:spcAft>
             </a:pPr>
             <a:r>
-              <a:rPr sz="1200" b="0">
+              <a:rPr sz="1150" b="0">
                 <a:solidFill>
                   <a:srgbClr val="1A1A1A"/>
                 </a:solidFill>
@@ -10292,16 +10387,310 @@
           </a:p>
         </p:txBody>
       </p:sp>
-      <p:sp>
-        <p:nvSpPr>
-          <p:cNvPr id="21" name="Rounded Rectangle 20"/>
+      <p:cxnSp>
+        <p:nvCxnSpPr>
+          <p:cNvPr id="26" name="Connector 25"/>
+          <p:cNvCxnSpPr/>
+          <p:nvPr/>
+        </p:nvCxnSpPr>
+        <p:spPr>
+          <a:xfrm>
+            <a:off x="841248" y="6437376"/>
+            <a:ext cx="10509199" cy="0"/>
+          </a:xfrm>
+          <a:prstGeom prst="bentConnector3">
+            <a:avLst/>
+          </a:prstGeom>
+          <a:ln w="12700">
+            <a:solidFill>
+              <a:srgbClr val="DDE1E6"/>
+            </a:solidFill>
+          </a:ln>
+          <a:effectLst/>
+        </p:spPr>
+        <p:style>
+          <a:lnRef idx="2">
+            <a:schemeClr val="accent1"/>
+          </a:lnRef>
+          <a:fillRef idx="0">
+            <a:schemeClr val="accent1"/>
+          </a:fillRef>
+          <a:effectRef idx="1">
+            <a:schemeClr val="accent1"/>
+          </a:effectRef>
+          <a:fontRef idx="minor">
+            <a:schemeClr val="tx1"/>
+          </a:fontRef>
+        </p:style>
+      </p:cxnSp>
+      <p:sp>
+        <p:nvSpPr>
+          <p:cNvPr id="27" name="TextBox 26"/>
+          <p:cNvSpPr txBox="1"/>
+          <p:nvPr/>
+        </p:nvSpPr>
+        <p:spPr>
+          <a:xfrm>
+            <a:off x="841248" y="6473952"/>
+            <a:ext cx="7315200" cy="274320"/>
+          </a:xfrm>
+          <a:prstGeom prst="rect">
+            <a:avLst/>
+          </a:prstGeom>
+          <a:noFill/>
+        </p:spPr>
+        <p:txBody>
+          <a:bodyPr wrap="square" anchor="t" lIns="0" rIns="0" tIns="0" bIns="0">
+            <a:spAutoFit/>
+          </a:bodyPr>
+          <a:lstStyle/>
+          <a:p>
+            <a:pPr algn="l">
+              <a:lnSpc>
+                <a:spcPct val="106000"/>
+              </a:lnSpc>
+              <a:spcBef>
+                <a:spcPts val="0"/>
+              </a:spcBef>
+              <a:spcAft>
+                <a:spcPts val="0"/>
+              </a:spcAft>
+            </a:pPr>
+            <a:r>
+              <a:rPr sz="950" b="0">
+                <a:solidFill>
+                  <a:srgbClr val="8A9099"/>
+                </a:solidFill>
+                <a:latin typeface="Red Hat Text"/>
+              </a:rPr>
+              <a:t>CONFIDENTIAL</a:t>
+            </a:r>
+          </a:p>
+        </p:txBody>
+      </p:sp>
+      <p:sp>
+        <p:nvSpPr>
+          <p:cNvPr id="28" name="TextBox 27"/>
+          <p:cNvSpPr txBox="1"/>
+          <p:nvPr/>
+        </p:nvSpPr>
+        <p:spPr>
+          <a:xfrm>
+            <a:off x="10801807" y="6473952"/>
+            <a:ext cx="548640" cy="274320"/>
+          </a:xfrm>
+          <a:prstGeom prst="rect">
+            <a:avLst/>
+          </a:prstGeom>
+          <a:noFill/>
+        </p:spPr>
+        <p:txBody>
+          <a:bodyPr wrap="square" anchor="t" lIns="0" rIns="0" tIns="0" bIns="0">
+            <a:spAutoFit/>
+          </a:bodyPr>
+          <a:lstStyle/>
+          <a:p>
+            <a:pPr algn="r">
+              <a:lnSpc>
+                <a:spcPct val="106000"/>
+              </a:lnSpc>
+              <a:spcBef>
+                <a:spcPts val="0"/>
+              </a:spcBef>
+              <a:spcAft>
+                <a:spcPts val="0"/>
+              </a:spcAft>
+            </a:pPr>
+            <a:r>
+              <a:rPr sz="950" b="0">
+                <a:solidFill>
+                  <a:srgbClr val="8A9099"/>
+                </a:solidFill>
+                <a:latin typeface="Red Hat Text"/>
+              </a:rPr>
+              <a:t>6</a:t>
+            </a:r>
+          </a:p>
+        </p:txBody>
+      </p:sp>
+    </p:spTree>
+  </p:cSld>
+  <p:clrMapOvr>
+    <a:masterClrMapping/>
+  </p:clrMapOvr>
+</p:sld>
+</file>
+
+<file path=ppt/slides/slide8.xml><?xml version="1.0" encoding="utf-8"?>
+<p:sld xmlns:a="http://schemas.openxmlformats.org/drawingml/2006/main" xmlns:p="http://schemas.openxmlformats.org/presentationml/2006/main" xmlns:r="http://schemas.openxmlformats.org/officeDocument/2006/relationships">
+  <p:cSld>
+    <p:spTree>
+      <p:nvGrpSpPr>
+        <p:cNvPr id="1" name=""/>
+        <p:cNvGrpSpPr/>
+        <p:nvPr/>
+      </p:nvGrpSpPr>
+      <p:grpSpPr/>
+      <p:pic>
+        <p:nvPicPr>
+          <p:cNvPr id="2" name="Picture 1" descr="redhat_logo.jpg"/>
+          <p:cNvPicPr>
+            <a:picLocks noChangeAspect="1"/>
+          </p:cNvPicPr>
+          <p:nvPr/>
+        </p:nvPicPr>
+        <p:blipFill>
+          <a:blip r:embed="rId2"/>
+          <a:stretch>
+            <a:fillRect/>
+          </a:stretch>
+        </p:blipFill>
+        <p:spPr>
+          <a:xfrm>
+            <a:off x="10326319" y="475488"/>
+            <a:ext cx="1024128" cy="242248"/>
+          </a:xfrm>
+          <a:prstGeom prst="rect">
+            <a:avLst/>
+          </a:prstGeom>
+        </p:spPr>
+      </p:pic>
+      <p:sp>
+        <p:nvSpPr>
+          <p:cNvPr id="3" name="TextBox 2"/>
+          <p:cNvSpPr txBox="1"/>
+          <p:nvPr/>
+        </p:nvSpPr>
+        <p:spPr>
+          <a:xfrm>
+            <a:off x="841248" y="548640"/>
+            <a:ext cx="8595360" cy="274320"/>
+          </a:xfrm>
+          <a:prstGeom prst="rect">
+            <a:avLst/>
+          </a:prstGeom>
+          <a:noFill/>
+        </p:spPr>
+        <p:txBody>
+          <a:bodyPr wrap="square" anchor="t" lIns="0" rIns="0" tIns="0" bIns="0">
+            <a:spAutoFit/>
+          </a:bodyPr>
+          <a:lstStyle/>
+          <a:p>
+            <a:pPr algn="l">
+              <a:lnSpc>
+                <a:spcPct val="106000"/>
+              </a:lnSpc>
+              <a:spcBef>
+                <a:spcPts val="0"/>
+              </a:spcBef>
+              <a:spcAft>
+                <a:spcPts val="0"/>
+              </a:spcAft>
+            </a:pPr>
+            <a:r>
+              <a:rPr sz="1250" b="1" spc="220">
+                <a:solidFill>
+                  <a:srgbClr val="EE0000"/>
+                </a:solidFill>
+                <a:latin typeface="Red Hat Display"/>
+              </a:rPr>
+              <a:t>M24 · AGENTIC AI ON OPENSHIFT</a:t>
+            </a:r>
+          </a:p>
+        </p:txBody>
+      </p:sp>
+      <p:sp>
+        <p:nvSpPr>
+          <p:cNvPr id="4" name="TextBox 3"/>
+          <p:cNvSpPr txBox="1"/>
+          <p:nvPr/>
+        </p:nvSpPr>
+        <p:spPr>
+          <a:xfrm>
+            <a:off x="841248" y="877824"/>
+            <a:ext cx="10515600" cy="548640"/>
+          </a:xfrm>
+          <a:prstGeom prst="rect">
+            <a:avLst/>
+          </a:prstGeom>
+          <a:noFill/>
+        </p:spPr>
+        <p:txBody>
+          <a:bodyPr wrap="none" anchor="t" lIns="0" rIns="0" tIns="0" bIns="0">
+            <a:spAutoFit/>
+          </a:bodyPr>
+          <a:lstStyle/>
+          <a:p>
+            <a:pPr algn="l">
+              <a:lnSpc>
+                <a:spcPct val="100000"/>
+              </a:lnSpc>
+              <a:spcBef>
+                <a:spcPts val="0"/>
+              </a:spcBef>
+              <a:spcAft>
+                <a:spcPts val="0"/>
+              </a:spcAft>
+            </a:pPr>
+            <a:r>
+              <a:rPr sz="2500" b="1">
+                <a:solidFill>
+                  <a:srgbClr val="1A1A1A"/>
+                </a:solidFill>
+                <a:latin typeface="Red Hat Display"/>
+              </a:rPr>
+              <a:t>Agent recap</a:t>
+            </a:r>
+          </a:p>
+        </p:txBody>
+      </p:sp>
+      <p:cxnSp>
+        <p:nvCxnSpPr>
+          <p:cNvPr id="5" name="Connector 4"/>
+          <p:cNvCxnSpPr/>
+          <p:nvPr/>
+        </p:nvCxnSpPr>
+        <p:spPr>
+          <a:xfrm>
+            <a:off x="841248" y="1554480"/>
+            <a:ext cx="1371600" cy="0"/>
+          </a:xfrm>
+          <a:prstGeom prst="bentConnector3">
+            <a:avLst/>
+          </a:prstGeom>
+          <a:ln w="31750">
+            <a:solidFill>
+              <a:srgbClr val="EE0000"/>
+            </a:solidFill>
+          </a:ln>
+          <a:effectLst/>
+        </p:spPr>
+        <p:style>
+          <a:lnRef idx="2">
+            <a:schemeClr val="accent1"/>
+          </a:lnRef>
+          <a:fillRef idx="0">
+            <a:schemeClr val="accent1"/>
+          </a:fillRef>
+          <a:effectRef idx="1">
+            <a:schemeClr val="accent1"/>
+          </a:effectRef>
+          <a:fontRef idx="minor">
+            <a:schemeClr val="tx1"/>
+          </a:fontRef>
+        </p:style>
+      </p:cxnSp>
+      <p:sp>
+        <p:nvSpPr>
+          <p:cNvPr id="6" name="Rounded Rectangle 5"/>
           <p:cNvSpPr/>
           <p:nvPr/>
         </p:nvSpPr>
         <p:spPr>
           <a:xfrm>
-            <a:off x="6812280" y="2395728"/>
-            <a:ext cx="4538167" cy="2944368"/>
+            <a:off x="841248" y="2331720"/>
+            <a:ext cx="10509199" cy="3794760"/>
           </a:xfrm>
           <a:prstGeom prst="roundRect">
             <a:avLst>
@@ -10340,169 +10729,33 @@
           </a:p>
         </p:txBody>
       </p:sp>
-      <p:sp>
-        <p:nvSpPr>
-          <p:cNvPr id="22" name="Rounded Rectangle 21"/>
-          <p:cNvSpPr/>
-          <p:nvPr/>
-        </p:nvSpPr>
-        <p:spPr>
-          <a:xfrm>
-            <a:off x="7013448" y="2596896"/>
-            <a:ext cx="1298448" cy="310896"/>
-          </a:xfrm>
-          <a:prstGeom prst="roundRect">
-            <a:avLst>
-              <a:gd name="adj" fmla="val 50000"/>
-            </a:avLst>
-          </a:prstGeom>
-          <a:solidFill>
-            <a:srgbClr val="FCECEC"/>
-          </a:solidFill>
-          <a:ln>
-            <a:noFill/>
-          </a:ln>
-          <a:effectLst/>
-        </p:spPr>
-        <p:style>
-          <a:lnRef idx="1">
-            <a:schemeClr val="accent1"/>
-          </a:lnRef>
-          <a:fillRef idx="3">
-            <a:schemeClr val="accent1"/>
-          </a:fillRef>
-          <a:effectRef idx="2">
-            <a:schemeClr val="accent1"/>
-          </a:effectRef>
-          <a:fontRef idx="minor">
-            <a:schemeClr val="lt1"/>
-          </a:fontRef>
-        </p:style>
-        <p:txBody>
-          <a:bodyPr rtlCol="0" anchor="ctr"/>
-          <a:lstStyle/>
-          <a:p>
-            <a:pPr algn="ctr"/>
-          </a:p>
-        </p:txBody>
-      </p:sp>
-      <p:sp>
-        <p:nvSpPr>
-          <p:cNvPr id="23" name="TextBox 22"/>
-          <p:cNvSpPr txBox="1"/>
-          <p:nvPr/>
-        </p:nvSpPr>
-        <p:spPr>
-          <a:xfrm>
-            <a:off x="7013448" y="2596896"/>
-            <a:ext cx="1298448" cy="310896"/>
-          </a:xfrm>
-          <a:prstGeom prst="rect">
-            <a:avLst/>
-          </a:prstGeom>
-          <a:noFill/>
-        </p:spPr>
-        <p:txBody>
-          <a:bodyPr wrap="none" anchor="ctr" lIns="0" rIns="0" tIns="0" bIns="0">
-            <a:spAutoFit/>
-          </a:bodyPr>
-          <a:lstStyle/>
-          <a:p>
-            <a:pPr algn="ctr">
-              <a:lnSpc>
-                <a:spcPct val="106000"/>
-              </a:lnSpc>
-              <a:spcBef>
-                <a:spcPts val="0"/>
-              </a:spcBef>
-              <a:spcAft>
-                <a:spcPts val="0"/>
-              </a:spcAft>
-            </a:pPr>
-            <a:r>
-              <a:rPr sz="850" b="1">
-                <a:solidFill>
-                  <a:srgbClr val="B80000"/>
-                </a:solidFill>
-                <a:latin typeface="Red Hat Display"/>
-              </a:rPr>
-              <a:t>MEDIA PASS</a:t>
-            </a:r>
-          </a:p>
-        </p:txBody>
-      </p:sp>
       <p:pic>
         <p:nvPicPr>
-          <p:cNvPr id="24" name="Picture 23" descr="eye_slate.png"/>
+          <p:cNvPr id="7" name="Picture 6" descr="03-agent-recap.png"/>
           <p:cNvPicPr>
             <a:picLocks noChangeAspect="1"/>
           </p:cNvPicPr>
           <p:nvPr/>
         </p:nvPicPr>
         <p:blipFill>
-          <a:blip r:embed="rId4"/>
+          <a:blip r:embed="rId3"/>
           <a:stretch>
             <a:fillRect/>
           </a:stretch>
         </p:blipFill>
         <p:spPr>
           <a:xfrm>
-            <a:off x="8843619" y="3108960"/>
-            <a:ext cx="475488" cy="475488"/>
+            <a:off x="1042416" y="3117345"/>
+            <a:ext cx="10106863" cy="2223509"/>
           </a:xfrm>
           <a:prstGeom prst="rect">
             <a:avLst/>
           </a:prstGeom>
         </p:spPr>
       </p:pic>
-      <p:sp>
-        <p:nvSpPr>
-          <p:cNvPr id="25" name="TextBox 24"/>
-          <p:cNvSpPr txBox="1"/>
-          <p:nvPr/>
-        </p:nvSpPr>
-        <p:spPr>
-          <a:xfrm>
-            <a:off x="7050024" y="3721608"/>
-            <a:ext cx="4062679" cy="1481328"/>
-          </a:xfrm>
-          <a:prstGeom prst="rect">
-            <a:avLst/>
-          </a:prstGeom>
-          <a:noFill/>
-        </p:spPr>
-        <p:txBody>
-          <a:bodyPr wrap="square" anchor="t" lIns="0" rIns="0" tIns="0" bIns="0">
-            <a:spAutoFit/>
-          </a:bodyPr>
-          <a:lstStyle/>
-          <a:p>
-            <a:pPr algn="l">
-              <a:lnSpc>
-                <a:spcPct val="120000"/>
-              </a:lnSpc>
-              <a:spcBef>
-                <a:spcPts val="0"/>
-              </a:spcBef>
-              <a:spcAft>
-                <a:spcPts val="0"/>
-              </a:spcAft>
-            </a:pPr>
-            <a:r>
-              <a:rPr sz="950" b="0">
-                <a:solidFill>
-                  <a:srgbClr val="8A9099"/>
-                </a:solidFill>
-                <a:latin typeface="Red Hat Text"/>
-              </a:rPr>
-              <a:t>Three-column "what you'll do" band — (1) a terminal showing a /agent/ask response with a highlighted toolCalls array; (2) a Topology view of three pods (parasol-agent, claims-db, policy-docs) all Ready; (3) a small "when NOT to use" checklist with three ticks. Footer ribbon: "AI apps are apps — same probes, same metrics, same golden path."</a:t>
-            </a:r>
-          </a:p>
-        </p:txBody>
-      </p:sp>
       <p:cxnSp>
         <p:nvCxnSpPr>
-          <p:cNvPr id="26" name="Connector 25"/>
+          <p:cNvPr id="8" name="Connector 7"/>
           <p:cNvCxnSpPr/>
           <p:nvPr/>
         </p:nvCxnSpPr>
@@ -10538,7 +10791,7 @@
       </p:cxnSp>
       <p:sp>
         <p:nvSpPr>
-          <p:cNvPr id="27" name="TextBox 26"/>
+          <p:cNvPr id="9" name="TextBox 8"/>
           <p:cNvSpPr txBox="1"/>
           <p:nvPr/>
         </p:nvSpPr>
@@ -10583,7 +10836,7 @@
       </p:sp>
       <p:sp>
         <p:nvSpPr>
-          <p:cNvPr id="28" name="TextBox 27"/>
+          <p:cNvPr id="10" name="TextBox 9"/>
           <p:cNvSpPr txBox="1"/>
           <p:nvPr/>
         </p:nvSpPr>
@@ -10621,7 +10874,7 @@
                 </a:solidFill>
                 <a:latin typeface="Red Hat Text"/>
               </a:rPr>
-              <a:t>6</a:t>
+              <a:t>7</a:t>
             </a:r>
           </a:p>
         </p:txBody>
